--- a/outputs/produkte/mama-ceo/03-praesentationen/saeule-2/04-lektion-2-4.pptx
+++ b/outputs/produkte/mama-ceo/03-praesentationen/saeule-2/04-lektion-2-4.pptx
@@ -4,6 +4,9 @@
   <p:sldMasterIdLst>
     <p:sldMasterId id="2147483648" r:id="rId1"/>
   </p:sldMasterIdLst>
+  <p:notesMasterIdLst>
+    <p:notesMasterId r:id="rId14"/>
+  </p:notesMasterIdLst>
   <p:sldIdLst>
     <p:sldId id="256" r:id="rId2"/>
     <p:sldId id="257" r:id="rId3"/>
@@ -18,10 +21,7 @@
     <p:sldId id="266" r:id="rId12"/>
     <p:sldId id="267" r:id="rId13"/>
   </p:sldIdLst>
-  <p:notesMasterIdLst>
-    <p:notesMasterId r:id="rId14"/>
-  </p:notesMasterIdLst>
-  <p:sldSz cx="9144000" cy="5143500"/>
+  <p:sldSz cx="9144000" cy="5143500" type="screen16x9"/>
   <p:notesSz cx="5143500" cy="9144000"/>
   <p:defaultTextStyle>
     <a:lvl1pPr marL="0" algn="l" defTabSz="914400" rtl="0" eaLnBrk="1" latinLnBrk="0" hangingPunct="1">
@@ -115,6 +115,11 @@
       </a:defRPr>
     </a:lvl9pPr>
   </p:defaultTextStyle>
+  <p:extLst>
+    <p:ext uri="{EFAFB233-063F-42B5-8137-9DF3F51BA10A}">
+      <p15:sldGuideLst xmlns:p15="http://schemas.microsoft.com/office/powerpoint/2012/main"/>
+    </p:ext>
+  </p:extLst>
 </p:presentation>
 </file>
 
@@ -140,234 +145,10 @@
           <a:chExt cx="0" cy="0"/>
         </a:xfrm>
       </p:grpSpPr>
-      <p:sp>
-        <p:nvSpPr>
-          <p:cNvPr id="2" name="Header Placeholder 1"/>
-          <p:cNvSpPr>
-            <a:spLocks noGrp="1"/>
-          </p:cNvSpPr>
-          <p:nvPr>
-            <p:ph type="hdr" sz="quarter"/>
-          </p:nvPr>
-        </p:nvSpPr>
-        <p:spPr>
-          <a:xfrm>
-            <a:off x="0" y="0"/>
-            <a:ext cx="2971800" cy="458788"/>
-          </a:xfrm>
-          <a:prstGeom prst="rect">
-            <a:avLst/>
-          </a:prstGeom>
-        </p:spPr>
-        <p:txBody>
-          <a:bodyPr vert="horz" lIns="91440" tIns="45720" rIns="91440" bIns="45720" rtlCol="0"/>
-          <a:lstStyle>
-            <a:lvl1pPr algn="l">
-              <a:defRPr sz="1200"/>
-            </a:lvl1pPr>
-          </a:lstStyle>
-          <a:p>
-            <a:endParaRPr lang="en-US"/>
-          </a:p>
-        </p:txBody>
-      </p:sp>
-      <p:sp>
-        <p:nvSpPr>
-          <p:cNvPr id="3" name="Date Placeholder 2"/>
-          <p:cNvSpPr>
-            <a:spLocks noGrp="1"/>
-          </p:cNvSpPr>
-          <p:nvPr>
-            <p:ph type="dt" idx="1"/>
-          </p:nvPr>
-        </p:nvSpPr>
-        <p:spPr>
-          <a:xfrm>
-            <a:off x="3884613" y="0"/>
-            <a:ext cx="2971800" cy="458788"/>
-          </a:xfrm>
-          <a:prstGeom prst="rect">
-            <a:avLst/>
-          </a:prstGeom>
-        </p:spPr>
-        <p:txBody>
-          <a:bodyPr vert="horz" lIns="91440" tIns="45720" rIns="91440" bIns="45720" rtlCol="0"/>
-          <a:lstStyle>
-            <a:lvl1pPr algn="r">
-              <a:defRPr sz="1200"/>
-            </a:lvl1pPr>
-          </a:lstStyle>
-          <a:p>
-            <a:fld id="{5282F153-3F37-0F45-9E97-73ACFA13230C}" type="datetimeFigureOut">
-              <a:rPr lang="en-US"/>
-              <a:t>7/23/19</a:t>
-            </a:fld>
-            <a:endParaRPr lang="en-US"/>
-          </a:p>
-        </p:txBody>
-      </p:sp>
-      <p:sp>
-        <p:nvSpPr>
-          <p:cNvPr id="4" name="Slide Image Placeholder 3"/>
-          <p:cNvSpPr>
-            <a:spLocks noGrp="1" noRot="1" noChangeAspect="1"/>
-          </p:cNvSpPr>
-          <p:nvPr>
-            <p:ph type="sldImg" idx="2"/>
-          </p:nvPr>
-        </p:nvSpPr>
-        <p:spPr>
-          <a:xfrm>
-            <a:off x="685800" y="1143000"/>
-            <a:ext cx="5486400" cy="3086100"/>
-          </a:xfrm>
-          <a:prstGeom prst="rect">
-            <a:avLst/>
-          </a:prstGeom>
-          <a:noFill/>
-          <a:ln w="12700">
-            <a:solidFill>
-              <a:prstClr val="black"/>
-            </a:solidFill>
-          </a:ln>
-        </p:spPr>
-        <p:txBody>
-          <a:bodyPr vert="horz" lIns="91440" tIns="45720" rIns="91440" bIns="45720" rtlCol="0" anchor="ctr"/>
-          <a:lstStyle/>
-          <a:p>
-            <a:endParaRPr lang="en-US"/>
-          </a:p>
-        </p:txBody>
-      </p:sp>
-      <p:sp>
-        <p:nvSpPr>
-          <p:cNvPr id="5" name="Notes Placeholder 4"/>
-          <p:cNvSpPr>
-            <a:spLocks noGrp="1"/>
-          </p:cNvSpPr>
-          <p:nvPr>
-            <p:ph type="body" sz="quarter" idx="3"/>
-          </p:nvPr>
-        </p:nvSpPr>
-        <p:spPr>
-          <a:xfrm>
-            <a:off x="685800" y="4400550"/>
-            <a:ext cx="5486400" cy="3600450"/>
-          </a:xfrm>
-          <a:prstGeom prst="rect">
-            <a:avLst/>
-          </a:prstGeom>
-        </p:spPr>
-        <p:txBody>
-          <a:bodyPr vert="horz" lIns="91440" tIns="45720" rIns="91440" bIns="45720" rtlCol="0"/>
-          <a:lstStyle/>
-          <a:p>
-            <a:pPr lvl="0"/>
-            <a:r>
-              <a:rPr lang="en-US"/>
-              <a:t>Click to edit Master text styles</a:t>
-            </a:r>
-          </a:p>
-          <a:p>
-            <a:pPr lvl="1"/>
-            <a:r>
-              <a:rPr lang="en-US"/>
-              <a:t>Second level</a:t>
-            </a:r>
-          </a:p>
-          <a:p>
-            <a:pPr lvl="2"/>
-            <a:r>
-              <a:rPr lang="en-US"/>
-              <a:t>Third level</a:t>
-            </a:r>
-          </a:p>
-          <a:p>
-            <a:pPr lvl="3"/>
-            <a:r>
-              <a:rPr lang="en-US"/>
-              <a:t>Fourth level</a:t>
-            </a:r>
-          </a:p>
-          <a:p>
-            <a:pPr lvl="4"/>
-            <a:r>
-              <a:rPr lang="en-US"/>
-              <a:t>Fifth level</a:t>
-            </a:r>
-          </a:p>
-        </p:txBody>
-      </p:sp>
-      <p:sp>
-        <p:nvSpPr>
-          <p:cNvPr id="6" name="Footer Placeholder 5"/>
-          <p:cNvSpPr>
-            <a:spLocks noGrp="1"/>
-          </p:cNvSpPr>
-          <p:nvPr>
-            <p:ph type="ftr" sz="quarter" idx="4"/>
-          </p:nvPr>
-        </p:nvSpPr>
-        <p:spPr>
-          <a:xfrm>
-            <a:off x="0" y="8685213"/>
-            <a:ext cx="2971800" cy="458787"/>
-          </a:xfrm>
-          <a:prstGeom prst="rect">
-            <a:avLst/>
-          </a:prstGeom>
-        </p:spPr>
-        <p:txBody>
-          <a:bodyPr vert="horz" lIns="91440" tIns="45720" rIns="91440" bIns="45720" rtlCol="0" anchor="b"/>
-          <a:lstStyle>
-            <a:lvl1pPr algn="l">
-              <a:defRPr sz="1200"/>
-            </a:lvl1pPr>
-          </a:lstStyle>
-          <a:p>
-            <a:endParaRPr lang="en-US"/>
-          </a:p>
-        </p:txBody>
-      </p:sp>
-      <p:sp>
-        <p:nvSpPr>
-          <p:cNvPr id="7" name="Slide Number Placeholder 6"/>
-          <p:cNvSpPr>
-            <a:spLocks noGrp="1"/>
-          </p:cNvSpPr>
-          <p:nvPr>
-            <p:ph type="sldNum" sz="quarter" idx="5"/>
-          </p:nvPr>
-        </p:nvSpPr>
-        <p:spPr>
-          <a:xfrm>
-            <a:off x="3884613" y="8685213"/>
-            <a:ext cx="2971800" cy="458787"/>
-          </a:xfrm>
-          <a:prstGeom prst="rect">
-            <a:avLst/>
-          </a:prstGeom>
-        </p:spPr>
-        <p:txBody>
-          <a:bodyPr vert="horz" lIns="91440" tIns="45720" rIns="91440" bIns="45720" rtlCol="0" anchor="b"/>
-          <a:lstStyle>
-            <a:lvl1pPr algn="r">
-              <a:defRPr sz="1200"/>
-            </a:lvl1pPr>
-          </a:lstStyle>
-          <a:p>
-            <a:fld id="{CE5E9CC1-C706-0F49-92D6-E571CC5EEA8F}" type="slidenum">
-              <a:rPr lang="en-US"/>
-              <a:t>‹#›</a:t>
-            </a:fld>
-            <a:endParaRPr lang="en-US"/>
-          </a:p>
-        </p:txBody>
-      </p:sp>
     </p:spTree>
     <p:extLst>
       <p:ext uri="{BB962C8B-B14F-4D97-AF65-F5344CB8AC3E}">
-        <p14:creationId xmlns:p14="http://schemas.microsoft.com/office/powerpoint/2010/main" val="1024086991"/>
+        <p14:creationId xmlns:p14="http://schemas.microsoft.com/office/powerpoint/2010/main" val="3605305274"/>
       </p:ext>
     </p:extLst>
   </p:cSld>
@@ -516,7 +297,6 @@
               <a:t>Intro:
 „In der letzten Lektion hast du deine 7 Rollen reduziert. Jetzt gehen wir EINE Stufe tiefer: pro Rolle, welche Aufgaben gehören dazu — und welche kannst du loswerden."</a:t>
             </a:r>
-            <a:endParaRPr lang="en-US" dirty="0"/>
           </a:p>
         </p:txBody>
       </p:sp>
@@ -605,7 +385,6 @@
               <a:t>Sprechnotiz:
 „Im Arbeitsblatt: pro deiner 7 Rollen listest du 5-10 Aufgaben. Pro Aufgabe markierst du B/D/A/X. Für die D-Markierungen machst du den 5-Schritt-Delegationsplan."</a:t>
             </a:r>
-            <a:endParaRPr lang="en-US" dirty="0"/>
           </a:p>
         </p:txBody>
       </p:sp>
@@ -694,7 +473,6 @@
               <a:t>Sprechnotiz:
 „Du hast jetzt ein Werkzeug das du den Rest deines Lebens nutzen kannst. Jedes Mal wenn du dich überlastet fühlst: durch den 4-Filter."</a:t>
             </a:r>
-            <a:endParaRPr lang="en-US" dirty="0"/>
           </a:p>
         </p:txBody>
       </p:sp>
@@ -783,7 +561,6 @@
               <a:t>Outro:
 „In der nächsten Lektion: wie deine Haushalts-Aufgaben in deinen Wochenrhythmus passen. Welcher Tag Haushalt, welcher Business. Bis dann."</a:t>
             </a:r>
-            <a:endParaRPr lang="en-US" dirty="0"/>
           </a:p>
         </p:txBody>
       </p:sp>
@@ -872,7 +649,6 @@
               <a:t>Sprechnotiz:
 „Der 4-Filter. Jede Aufgabe geht durch genau einen davon. B = Behalten — nur du. D = Delegieren — an Partner / Kinder / Eltern / Putzkraft. A = Automatisieren — Tool / Bot / Bestelldienst. A = Aufhören — fällt komplett weg."</a:t>
             </a:r>
-            <a:endParaRPr lang="en-US" dirty="0"/>
           </a:p>
         </p:txBody>
       </p:sp>
@@ -961,7 +737,6 @@
               <a:t>Sprechnotiz:
 „Wir denken oft nur an Delegieren oder Automatisieren — und vergessen AUFHÖREN. Frag dich pro Aufgabe: was passiert wirklich wenn ich's nicht mehr mache? Sehr oft: nichts. Oder es ist nach 2 Wochen vergessen. AUFHÖREN ist der grösste Hebel."</a:t>
             </a:r>
-            <a:endParaRPr lang="en-US" dirty="0"/>
           </a:p>
         </p:txBody>
       </p:sp>
@@ -1050,7 +825,6 @@
               <a:t>Sprechnotiz:
 „Beispiele aus meinem eigenen Leben: WhatsApp-Familiengruppe stumm. Wäsche falte ich nicht mehr — zerknittert reicht, die ist eh wieder zerknittert in 2 Tagen. Tägliches Putzen weggefallen — Wochenend-Putz reicht. Geburtstagsgrüsse als WhatsApp-Sprachnotiz statt Anruf. Klingt klein. Summiert sich auf 5+ Stunden pro Woche."</a:t>
             </a:r>
-            <a:endParaRPr lang="en-US" dirty="0"/>
           </a:p>
         </p:txBody>
       </p:sp>
@@ -1139,7 +913,6 @@
               <a:t>Sprechnotiz:
 „Delegieren heisst nicht nur ‚an die Putzkraft'. Es heisst: an wen kannst du WAS abgeben? Partner: oft mehr als du denkst, aber er muss klar wissen WAS. Kinder ab 6: Tischabräumen, Wäsche in Korb, Schulranzen-Vorbereitung. Eltern: Babysitting wenn nah. Externe: Putzkraft 2× monatlich, Migros-Lieferung, Babysitter für Date."</a:t>
             </a:r>
-            <a:endParaRPr lang="en-US" dirty="0"/>
           </a:p>
         </p:txBody>
       </p:sp>
@@ -1228,7 +1001,6 @@
               <a:t>Sprechnotiz:
 „Mein Delegationsplan in 5 Schritten. Eins: Liste aller Mama-Alltag-Aufgaben. Zwei: markieren welche delegierbar sind. Drei: pro Aufgabe entscheiden AN WEN. Vier: priorisieren — was kann SOFORT abgegeben werden. Fünf: klar kommunizieren — was, wer, bis wann, mit welchen Infos. Wichtig: vertrau der Person dass sie's hinkriegt — anders als du, aber hin."</a:t>
             </a:r>
-            <a:endParaRPr lang="en-US" dirty="0"/>
           </a:p>
         </p:txBody>
       </p:sp>
@@ -1317,7 +1089,6 @@
               <a:t>Sprechnotiz:
 „Automatisieren — was geht heute schon ohne dass du Tech-Profi sein musst. Migros-Online-Lieferung wiederkehrend (Wochenend-Grosseinkauf läuft automatisch). Geburtstags-Erinnerungen im Kalender. Geteilter Familienkalender. Sonntag-Wochenplan-Mail an alle. KI-Bots kommen in Säule 4 — aber das hier kannst du ab nächster Woche."</a:t>
             </a:r>
-            <a:endParaRPr lang="en-US" dirty="0"/>
           </a:p>
         </p:txBody>
       </p:sp>
@@ -1406,7 +1177,6 @@
               <a:t>Sprechnotiz:
 „Heute setzt du dir KEIN unrealistisches Ziel. Pro Rolle: identifiziere 1 Aufgabe die ab dieser Woche WEG ist — delegiert, automatisiert oder aufgehört. 7 Rollen = 7 Aufgaben weg = ungefähr 3-5 Stunden pro Woche zurück."</a:t>
             </a:r>
-            <a:endParaRPr lang="en-US" dirty="0"/>
           </a:p>
         </p:txBody>
       </p:sp>
@@ -1495,7 +1265,6 @@
               <a:t>Sprechnotiz:
 „Wenn du delegierst — wie sagst du's? Wichtig: nicht als Vorwurf, als Ich-Botschaft. ‚Ich brauche deine Hilfe bei X. Was hältst du davon wenn du ab nächster Woche Y machst?' Statt ‚du machst nie was im Haushalt'. Plus: ergebnisoffen. Wenn Partner Y anders macht als du — das ist OK."</a:t>
             </a:r>
-            <a:endParaRPr lang="en-US" dirty="0"/>
           </a:p>
         </p:txBody>
       </p:sp>
@@ -1568,6 +1337,11 @@
 <file path=ppt/slideMasters/slideMaster1.xml><?xml version="1.0" encoding="utf-8"?>
 <p:sldMaster xmlns:a="http://schemas.openxmlformats.org/drawingml/2006/main" xmlns:r="http://schemas.openxmlformats.org/officeDocument/2006/relationships" xmlns:p="http://schemas.openxmlformats.org/presentationml/2006/main">
   <p:cSld>
+    <p:bg>
+      <p:bgRef idx="1001">
+        <a:schemeClr val="bg1"/>
+      </p:bgRef>
+    </p:bg>
     <p:spTree>
       <p:nvGrpSpPr>
         <p:cNvPr id="1" name=""/>
@@ -1850,6 +1624,7 @@
         <a:solidFill>
           <a:srgbClr val="F1ECDD"/>
         </a:solidFill>
+        <a:effectLst/>
       </p:bgPr>
     </p:bg>
     <p:spTree>
@@ -1894,6 +1669,13 @@
             <a:prstDash val="solid"/>
           </a:ln>
         </p:spPr>
+        <p:txBody>
+          <a:bodyPr/>
+          <a:lstStyle/>
+          <a:p>
+            <a:endParaRPr lang="de-CH"/>
+          </a:p>
+        </p:txBody>
       </p:sp>
       <p:sp>
         <p:nvSpPr>
@@ -1916,11 +1698,11 @@
           <a:bodyPr wrap="square" rtlCol="0" anchor="ctr"/>
           <a:lstStyle/>
           <a:p>
-            <a:pPr indent="0" marL="0">
-              <a:buNone/>
-            </a:pPr>
-            <a:r>
-              <a:rPr lang="en-US" sz="1100" b="1" spc="400" kern="0" dirty="0">
+            <a:pPr marL="0" indent="0">
+              <a:buNone/>
+            </a:pPr>
+            <a:r>
+              <a:rPr lang="en-US" sz="1100" b="1" kern="0" spc="400" dirty="0">
                 <a:solidFill>
                   <a:srgbClr val="DC822E"/>
                 </a:solidFill>
@@ -1960,6 +1742,13 @@
             <a:prstDash val="solid"/>
           </a:ln>
         </p:spPr>
+        <p:txBody>
+          <a:bodyPr/>
+          <a:lstStyle/>
+          <a:p>
+            <a:endParaRPr lang="de-CH"/>
+          </a:p>
+        </p:txBody>
       </p:sp>
       <p:sp>
         <p:nvSpPr>
@@ -1982,7 +1771,7 @@
           <a:bodyPr wrap="square" lIns="0" tIns="0" rIns="0" bIns="0" rtlCol="0" anchor="t"/>
           <a:lstStyle/>
           <a:p>
-            <a:pPr indent="0" marL="0">
+            <a:pPr marL="0" indent="0">
               <a:buNone/>
             </a:pPr>
             <a:r>
@@ -1994,51 +1783,50 @@
                 <a:ea typeface="Georgia" pitchFamily="34" charset="-122"/>
                 <a:cs typeface="Georgia" pitchFamily="34" charset="-120"/>
               </a:rPr>
-              <a:t>Was kann WEG — 4-Filter</a:t>
-            </a:r>
-            <a:endParaRPr lang="en-US" sz="4800" dirty="0"/>
-          </a:p>
-        </p:txBody>
-      </p:sp>
-      <p:sp>
-        <p:nvSpPr>
-          <p:cNvPr id="6" name="Text 4"/>
-          <p:cNvSpPr/>
-          <p:nvPr/>
-        </p:nvSpPr>
-        <p:spPr>
-          <a:xfrm>
-            <a:off x="548640" y="2743200"/>
-            <a:ext cx="8046720" cy="1371600"/>
-          </a:xfrm>
-          <a:prstGeom prst="rect">
-            <a:avLst/>
-          </a:prstGeom>
-          <a:noFill/>
-          <a:ln/>
-        </p:spPr>
-        <p:txBody>
-          <a:bodyPr wrap="square" lIns="0" tIns="0" rIns="0" bIns="0" rtlCol="0" anchor="t"/>
-          <a:lstStyle/>
-          <a:p>
-            <a:pPr indent="0" marL="0">
-              <a:buNone/>
-            </a:pPr>
-            <a:r>
-              <a:rPr lang="en-US" sz="1800" i="1" dirty="0">
-                <a:solidFill>
-                  <a:srgbClr val="2C3E50"/>
+              <a:t>Was kann WEG — </a:t>
+            </a:r>
+          </a:p>
+          <a:p>
+            <a:pPr marL="0" indent="0">
+              <a:buNone/>
+            </a:pPr>
+            <a:r>
+              <a:rPr lang="en-US" sz="4800" b="1" dirty="0">
+                <a:solidFill>
+                  <a:srgbClr val="1A3A4A"/>
                 </a:solidFill>
                 <a:latin typeface="Georgia" pitchFamily="34" charset="0"/>
                 <a:ea typeface="Georgia" pitchFamily="34" charset="-122"/>
                 <a:cs typeface="Georgia" pitchFamily="34" charset="-120"/>
               </a:rPr>
-              <a:t>In der letzten Lektion hast du deine 7 Rollen reduziert.</a:t>
-            </a:r>
-            <a:endParaRPr lang="en-US" sz="1800" dirty="0"/>
-          </a:p>
-          <a:p>
-            <a:pPr indent="0" marL="0">
+              <a:t>4-Filter</a:t>
+            </a:r>
+            <a:endParaRPr lang="en-US" sz="4800" dirty="0"/>
+          </a:p>
+        </p:txBody>
+      </p:sp>
+      <p:sp>
+        <p:nvSpPr>
+          <p:cNvPr id="6" name="Text 4"/>
+          <p:cNvSpPr/>
+          <p:nvPr/>
+        </p:nvSpPr>
+        <p:spPr>
+          <a:xfrm>
+            <a:off x="548640" y="2743200"/>
+            <a:ext cx="8046720" cy="1371600"/>
+          </a:xfrm>
+          <a:prstGeom prst="rect">
+            <a:avLst/>
+          </a:prstGeom>
+          <a:noFill/>
+          <a:ln/>
+        </p:spPr>
+        <p:txBody>
+          <a:bodyPr wrap="square" lIns="0" tIns="0" rIns="0" bIns="0" rtlCol="0" anchor="t"/>
+          <a:lstStyle/>
+          <a:p>
+            <a:pPr marL="0" indent="0">
               <a:buNone/>
             </a:pPr>
             <a:r>
@@ -2050,12 +1838,12 @@
                 <a:ea typeface="Georgia" pitchFamily="34" charset="-122"/>
                 <a:cs typeface="Georgia" pitchFamily="34" charset="-120"/>
               </a:rPr>
-              <a:t>Jetzt gehen wir EINE Stufe tiefer:</a:t>
+              <a:t>In der letzten Lektion hast du deine 7 Rollen reduziert.</a:t>
             </a:r>
             <a:endParaRPr lang="en-US" sz="1800" dirty="0"/>
           </a:p>
           <a:p>
-            <a:pPr indent="0" marL="0">
+            <a:pPr marL="0" indent="0">
               <a:buNone/>
             </a:pPr>
             <a:r>
@@ -2067,6 +1855,23 @@
                 <a:ea typeface="Georgia" pitchFamily="34" charset="-122"/>
                 <a:cs typeface="Georgia" pitchFamily="34" charset="-120"/>
               </a:rPr>
+              <a:t>Jetzt gehen wir EINE Stufe tiefer:</a:t>
+            </a:r>
+            <a:endParaRPr lang="en-US" sz="1800" dirty="0"/>
+          </a:p>
+          <a:p>
+            <a:pPr marL="0" indent="0">
+              <a:buNone/>
+            </a:pPr>
+            <a:r>
+              <a:rPr lang="en-US" sz="1800" i="1" dirty="0">
+                <a:solidFill>
+                  <a:srgbClr val="2C3E50"/>
+                </a:solidFill>
+                <a:latin typeface="Georgia" pitchFamily="34" charset="0"/>
+                <a:ea typeface="Georgia" pitchFamily="34" charset="-122"/>
+                <a:cs typeface="Georgia" pitchFamily="34" charset="-120"/>
+              </a:rPr>
               <a:t>pro Rolle welche AUFGABEN gehören dazu — und welche kannst du loswerden?</a:t>
             </a:r>
             <a:endParaRPr lang="en-US" sz="1800" dirty="0"/>
@@ -2094,7 +1899,7 @@
           <a:bodyPr wrap="square" rtlCol="0" anchor="ctr"/>
           <a:lstStyle/>
           <a:p>
-            <a:pPr indent="0" marL="0">
+            <a:pPr marL="0" indent="0">
               <a:buNone/>
             </a:pPr>
             <a:r>
@@ -2133,7 +1938,7 @@
           <a:bodyPr wrap="square" rtlCol="0" anchor="ctr"/>
           <a:lstStyle/>
           <a:p>
-            <a:pPr algn="r" indent="0" marL="0">
+            <a:pPr marL="0" indent="0" algn="r">
               <a:buNone/>
             </a:pPr>
             <a:r>
@@ -2167,6 +1972,7 @@
         <a:solidFill>
           <a:srgbClr val="12828C"/>
         </a:solidFill>
+        <a:effectLst/>
       </p:bgPr>
     </p:bg>
     <p:spTree>
@@ -2191,7 +1997,7 @@
         </p:nvSpPr>
         <p:spPr>
           <a:xfrm>
-            <a:off x="548640" y="1188720"/>
+            <a:off x="548640" y="503767"/>
             <a:ext cx="8046720" cy="365760"/>
           </a:xfrm>
           <a:prstGeom prst="rect">
@@ -2204,11 +2010,11 @@
           <a:bodyPr wrap="square" rtlCol="0" anchor="ctr"/>
           <a:lstStyle/>
           <a:p>
-            <a:pPr algn="ctr" indent="0" marL="0">
-              <a:buNone/>
-            </a:pPr>
-            <a:r>
-              <a:rPr lang="en-US" sz="1100" b="1" spc="400" kern="0" dirty="0">
+            <a:pPr marL="0" indent="0" algn="ctr">
+              <a:buNone/>
+            </a:pPr>
+            <a:r>
+              <a:rPr lang="en-US" sz="1100" b="1" kern="0" spc="400" dirty="0">
                 <a:solidFill>
                   <a:srgbClr val="DC822E"/>
                 </a:solidFill>
@@ -2230,7 +2036,7 @@
         </p:nvSpPr>
         <p:spPr>
           <a:xfrm>
-            <a:off x="4297680" y="1691640"/>
+            <a:off x="4297680" y="874607"/>
             <a:ext cx="548640" cy="36576"/>
           </a:xfrm>
           <a:prstGeom prst="rect">
@@ -2248,6 +2054,13 @@
             <a:prstDash val="solid"/>
           </a:ln>
         </p:spPr>
+        <p:txBody>
+          <a:bodyPr/>
+          <a:lstStyle/>
+          <a:p>
+            <a:endParaRPr lang="de-CH"/>
+          </a:p>
+        </p:txBody>
       </p:sp>
       <p:sp>
         <p:nvSpPr>
@@ -2270,11 +2083,11 @@
           <a:bodyPr wrap="square" lIns="0" tIns="0" rIns="0" bIns="0" rtlCol="0" anchor="ctr"/>
           <a:lstStyle/>
           <a:p>
-            <a:pPr algn="ctr" indent="0" marL="0">
-              <a:buNone/>
-            </a:pPr>
-            <a:r>
-              <a:rPr lang="en-US" sz="3600" b="1" dirty="0">
+            <a:pPr marL="0" indent="0" algn="ctr">
+              <a:buNone/>
+            </a:pPr>
+            <a:r>
+              <a:rPr lang="en-US" sz="3200" b="1" dirty="0">
                 <a:solidFill>
                   <a:srgbClr val="F1ECDD"/>
                 </a:solidFill>
@@ -2284,14 +2097,14 @@
               </a:rPr>
               <a:t>Pro deiner 7 Rollen: 5–10 Aufgaben listen.</a:t>
             </a:r>
-            <a:endParaRPr lang="en-US" sz="3600" dirty="0"/>
-          </a:p>
-          <a:p>
-            <a:pPr algn="ctr" indent="0" marL="0">
-              <a:buNone/>
-            </a:pPr>
-            <a:r>
-              <a:rPr lang="en-US" sz="3600" b="1" dirty="0">
+            <a:endParaRPr lang="en-US" sz="3200" dirty="0"/>
+          </a:p>
+          <a:p>
+            <a:pPr marL="0" indent="0" algn="ctr">
+              <a:buNone/>
+            </a:pPr>
+            <a:r>
+              <a:rPr lang="en-US" sz="3200" b="1" dirty="0">
                 <a:solidFill>
                   <a:srgbClr val="F1ECDD"/>
                 </a:solidFill>
@@ -2301,14 +2114,14 @@
               </a:rPr>
               <a:t>Pro Aufgabe: B / D / A / X markieren.</a:t>
             </a:r>
-            <a:endParaRPr lang="en-US" sz="3600" dirty="0"/>
-          </a:p>
-          <a:p>
-            <a:pPr algn="ctr" indent="0" marL="0">
-              <a:buNone/>
-            </a:pPr>
-            <a:r>
-              <a:rPr lang="en-US" sz="3600" b="1" dirty="0">
+            <a:endParaRPr lang="en-US" sz="3200" dirty="0"/>
+          </a:p>
+          <a:p>
+            <a:pPr marL="0" indent="0" algn="ctr">
+              <a:buNone/>
+            </a:pPr>
+            <a:r>
+              <a:rPr lang="en-US" sz="3200" b="1" dirty="0">
                 <a:solidFill>
                   <a:srgbClr val="F1ECDD"/>
                 </a:solidFill>
@@ -2318,7 +2131,7 @@
               </a:rPr>
               <a:t>Für die D-Markierungen: 5-Schritt-Delegationsplan.</a:t>
             </a:r>
-            <a:endParaRPr lang="en-US" sz="3600" dirty="0"/>
+            <a:endParaRPr lang="en-US" sz="3200" dirty="0"/>
           </a:p>
         </p:txBody>
       </p:sp>
@@ -2343,11 +2156,11 @@
           <a:bodyPr wrap="square" rtlCol="0" anchor="ctr"/>
           <a:lstStyle/>
           <a:p>
-            <a:pPr indent="0" marL="0">
-              <a:buNone/>
-            </a:pPr>
-            <a:r>
-              <a:rPr lang="en-US" sz="900" spc="200" kern="0" dirty="0">
+            <a:pPr marL="0" indent="0">
+              <a:buNone/>
+            </a:pPr>
+            <a:r>
+              <a:rPr lang="en-US" sz="900" kern="0" spc="200" dirty="0">
                 <a:solidFill>
                   <a:srgbClr val="F1ECDD"/>
                 </a:solidFill>
@@ -2382,7 +2195,7 @@
           <a:bodyPr wrap="square" rtlCol="0" anchor="ctr"/>
           <a:lstStyle/>
           <a:p>
-            <a:pPr algn="r" indent="0" marL="0">
+            <a:pPr marL="0" indent="0" algn="r">
               <a:buNone/>
             </a:pPr>
             <a:r>
@@ -2416,6 +2229,7 @@
         <a:solidFill>
           <a:srgbClr val="12828C"/>
         </a:solidFill>
+        <a:effectLst/>
       </p:bgPr>
     </p:bg>
     <p:spTree>
@@ -2453,11 +2267,11 @@
           <a:bodyPr wrap="square" rtlCol="0" anchor="ctr"/>
           <a:lstStyle/>
           <a:p>
-            <a:pPr indent="0" marL="0">
-              <a:buNone/>
-            </a:pPr>
-            <a:r>
-              <a:rPr lang="en-US" sz="1100" b="1" spc="400" kern="0" dirty="0">
+            <a:pPr marL="0" indent="0">
+              <a:buNone/>
+            </a:pPr>
+            <a:r>
+              <a:rPr lang="en-US" sz="1100" b="1" kern="0" spc="400" dirty="0">
                 <a:solidFill>
                   <a:srgbClr val="DC822E"/>
                 </a:solidFill>
@@ -2492,7 +2306,7 @@
           <a:bodyPr wrap="square" lIns="0" tIns="0" rIns="0" bIns="0" rtlCol="0" anchor="t"/>
           <a:lstStyle/>
           <a:p>
-            <a:pPr indent="0" marL="0">
+            <a:pPr marL="0" indent="0">
               <a:buNone/>
             </a:pPr>
             <a:r>
@@ -2536,6 +2350,13 @@
             <a:prstDash val="solid"/>
           </a:ln>
         </p:spPr>
+        <p:txBody>
+          <a:bodyPr/>
+          <a:lstStyle/>
+          <a:p>
+            <a:endParaRPr lang="de-CH"/>
+          </a:p>
+        </p:txBody>
       </p:sp>
       <p:sp>
         <p:nvSpPr>
@@ -2558,7 +2379,7 @@
           <a:bodyPr wrap="square" lIns="0" tIns="0" rIns="0" bIns="0" rtlCol="0" anchor="ctr"/>
           <a:lstStyle/>
           <a:p>
-            <a:pPr algn="ctr" indent="0" marL="0">
+            <a:pPr marL="0" indent="0" algn="ctr">
               <a:buNone/>
             </a:pPr>
             <a:r>
@@ -2597,7 +2418,7 @@
           <a:bodyPr wrap="square" lIns="0" tIns="0" rIns="0" bIns="0" rtlCol="0" anchor="ctr"/>
           <a:lstStyle/>
           <a:p>
-            <a:pPr indent="0" marL="0">
+            <a:pPr marL="0" indent="0">
               <a:buNone/>
             </a:pPr>
             <a:r>
@@ -2641,6 +2462,13 @@
             <a:prstDash val="solid"/>
           </a:ln>
         </p:spPr>
+        <p:txBody>
+          <a:bodyPr/>
+          <a:lstStyle/>
+          <a:p>
+            <a:endParaRPr lang="de-CH"/>
+          </a:p>
+        </p:txBody>
       </p:sp>
       <p:sp>
         <p:nvSpPr>
@@ -2663,7 +2491,7 @@
           <a:bodyPr wrap="square" lIns="0" tIns="0" rIns="0" bIns="0" rtlCol="0" anchor="ctr"/>
           <a:lstStyle/>
           <a:p>
-            <a:pPr algn="ctr" indent="0" marL="0">
+            <a:pPr marL="0" indent="0" algn="ctr">
               <a:buNone/>
             </a:pPr>
             <a:r>
@@ -2702,7 +2530,7 @@
           <a:bodyPr wrap="square" lIns="0" tIns="0" rIns="0" bIns="0" rtlCol="0" anchor="ctr"/>
           <a:lstStyle/>
           <a:p>
-            <a:pPr indent="0" marL="0">
+            <a:pPr marL="0" indent="0">
               <a:buNone/>
             </a:pPr>
             <a:r>
@@ -2746,6 +2574,13 @@
             <a:prstDash val="solid"/>
           </a:ln>
         </p:spPr>
+        <p:txBody>
+          <a:bodyPr/>
+          <a:lstStyle/>
+          <a:p>
+            <a:endParaRPr lang="de-CH"/>
+          </a:p>
+        </p:txBody>
       </p:sp>
       <p:sp>
         <p:nvSpPr>
@@ -2768,7 +2603,7 @@
           <a:bodyPr wrap="square" lIns="0" tIns="0" rIns="0" bIns="0" rtlCol="0" anchor="ctr"/>
           <a:lstStyle/>
           <a:p>
-            <a:pPr algn="ctr" indent="0" marL="0">
+            <a:pPr marL="0" indent="0" algn="ctr">
               <a:buNone/>
             </a:pPr>
             <a:r>
@@ -2807,7 +2642,7 @@
           <a:bodyPr wrap="square" lIns="0" tIns="0" rIns="0" bIns="0" rtlCol="0" anchor="ctr"/>
           <a:lstStyle/>
           <a:p>
-            <a:pPr indent="0" marL="0">
+            <a:pPr marL="0" indent="0">
               <a:buNone/>
             </a:pPr>
             <a:r>
@@ -2851,6 +2686,13 @@
             <a:prstDash val="solid"/>
           </a:ln>
         </p:spPr>
+        <p:txBody>
+          <a:bodyPr/>
+          <a:lstStyle/>
+          <a:p>
+            <a:endParaRPr lang="de-CH"/>
+          </a:p>
+        </p:txBody>
       </p:sp>
       <p:sp>
         <p:nvSpPr>
@@ -2873,7 +2715,7 @@
           <a:bodyPr wrap="square" lIns="0" tIns="0" rIns="0" bIns="0" rtlCol="0" anchor="ctr"/>
           <a:lstStyle/>
           <a:p>
-            <a:pPr algn="ctr" indent="0" marL="0">
+            <a:pPr marL="0" indent="0" algn="ctr">
               <a:buNone/>
             </a:pPr>
             <a:r>
@@ -2912,7 +2754,7 @@
           <a:bodyPr wrap="square" lIns="0" tIns="0" rIns="0" bIns="0" rtlCol="0" anchor="ctr"/>
           <a:lstStyle/>
           <a:p>
-            <a:pPr indent="0" marL="0">
+            <a:pPr marL="0" indent="0">
               <a:buNone/>
             </a:pPr>
             <a:r>
@@ -2951,11 +2793,11 @@
           <a:bodyPr wrap="square" rtlCol="0" anchor="ctr"/>
           <a:lstStyle/>
           <a:p>
-            <a:pPr indent="0" marL="0">
-              <a:buNone/>
-            </a:pPr>
-            <a:r>
-              <a:rPr lang="en-US" sz="900" spc="200" kern="0" dirty="0">
+            <a:pPr marL="0" indent="0">
+              <a:buNone/>
+            </a:pPr>
+            <a:r>
+              <a:rPr lang="en-US" sz="900" kern="0" spc="200" dirty="0">
                 <a:solidFill>
                   <a:srgbClr val="F1ECDD"/>
                 </a:solidFill>
@@ -2990,7 +2832,7 @@
           <a:bodyPr wrap="square" rtlCol="0" anchor="ctr"/>
           <a:lstStyle/>
           <a:p>
-            <a:pPr algn="r" indent="0" marL="0">
+            <a:pPr marL="0" indent="0" algn="r">
               <a:buNone/>
             </a:pPr>
             <a:r>
@@ -3024,6 +2866,7 @@
         <a:solidFill>
           <a:srgbClr val="FFFFFF"/>
         </a:solidFill>
+        <a:effectLst/>
       </p:bgPr>
     </p:bg>
     <p:spTree>
@@ -3061,7 +2904,7 @@
           <a:bodyPr wrap="square" lIns="0" tIns="0" rIns="0" bIns="0" rtlCol="0" anchor="t"/>
           <a:lstStyle/>
           <a:p>
-            <a:pPr indent="0" marL="0">
+            <a:pPr marL="0" indent="0">
               <a:buNone/>
             </a:pPr>
             <a:r>
@@ -3105,6 +2948,13 @@
             <a:prstDash val="solid"/>
           </a:ln>
         </p:spPr>
+        <p:txBody>
+          <a:bodyPr/>
+          <a:lstStyle/>
+          <a:p>
+            <a:endParaRPr lang="de-CH"/>
+          </a:p>
+        </p:txBody>
       </p:sp>
       <p:sp>
         <p:nvSpPr>
@@ -3132,6 +2982,13 @@
             <a:prstDash val="solid"/>
           </a:ln>
         </p:spPr>
+        <p:txBody>
+          <a:bodyPr/>
+          <a:lstStyle/>
+          <a:p>
+            <a:endParaRPr lang="de-CH"/>
+          </a:p>
+        </p:txBody>
       </p:sp>
       <p:sp>
         <p:nvSpPr>
@@ -3154,11 +3011,11 @@
           <a:bodyPr wrap="square" rtlCol="0" anchor="ctr"/>
           <a:lstStyle/>
           <a:p>
-            <a:pPr indent="0" marL="0">
-              <a:buNone/>
-            </a:pPr>
-            <a:r>
-              <a:rPr lang="en-US" sz="1000" b="1" spc="300" kern="0" dirty="0">
+            <a:pPr marL="0" indent="0">
+              <a:buNone/>
+            </a:pPr>
+            <a:r>
+              <a:rPr lang="en-US" sz="1000" b="1" kern="0" spc="300" dirty="0">
                 <a:solidFill>
                   <a:srgbClr val="0D6168"/>
                 </a:solidFill>
@@ -3193,7 +3050,7 @@
           <a:bodyPr wrap="square" lIns="0" tIns="0" rIns="0" bIns="0" rtlCol="0" anchor="t"/>
           <a:lstStyle/>
           <a:p>
-            <a:pPr indent="0" marL="0">
+            <a:pPr marL="0" indent="0">
               <a:buNone/>
             </a:pPr>
             <a:r>
@@ -3322,6 +3179,13 @@
             <a:prstDash val="solid"/>
           </a:ln>
         </p:spPr>
+        <p:txBody>
+          <a:bodyPr/>
+          <a:lstStyle/>
+          <a:p>
+            <a:endParaRPr lang="de-CH"/>
+          </a:p>
+        </p:txBody>
       </p:sp>
       <p:sp>
         <p:nvSpPr>
@@ -3349,6 +3213,13 @@
             <a:prstDash val="solid"/>
           </a:ln>
         </p:spPr>
+        <p:txBody>
+          <a:bodyPr/>
+          <a:lstStyle/>
+          <a:p>
+            <a:endParaRPr lang="de-CH"/>
+          </a:p>
+        </p:txBody>
       </p:sp>
       <p:sp>
         <p:nvSpPr>
@@ -3371,11 +3242,11 @@
           <a:bodyPr wrap="square" rtlCol="0" anchor="ctr"/>
           <a:lstStyle/>
           <a:p>
-            <a:pPr indent="0" marL="0">
-              <a:buNone/>
-            </a:pPr>
-            <a:r>
-              <a:rPr lang="en-US" sz="1000" b="1" spc="300" kern="0" dirty="0">
+            <a:pPr marL="0" indent="0">
+              <a:buNone/>
+            </a:pPr>
+            <a:r>
+              <a:rPr lang="en-US" sz="1000" b="1" kern="0" spc="300" dirty="0">
                 <a:solidFill>
                   <a:srgbClr val="DC822E"/>
                 </a:solidFill>
@@ -3410,7 +3281,7 @@
           <a:bodyPr wrap="square" lIns="0" tIns="0" rIns="0" bIns="0" rtlCol="0" anchor="t"/>
           <a:lstStyle/>
           <a:p>
-            <a:pPr indent="0" marL="0">
+            <a:pPr marL="0" indent="0">
               <a:buNone/>
             </a:pPr>
             <a:r>
@@ -3534,11 +3405,11 @@
           <a:bodyPr wrap="square" rtlCol="0" anchor="ctr"/>
           <a:lstStyle/>
           <a:p>
-            <a:pPr indent="0" marL="0">
-              <a:buNone/>
-            </a:pPr>
-            <a:r>
-              <a:rPr lang="en-US" sz="900" spc="200" kern="0" dirty="0">
+            <a:pPr marL="0" indent="0">
+              <a:buNone/>
+            </a:pPr>
+            <a:r>
+              <a:rPr lang="en-US" sz="900" kern="0" spc="200" dirty="0">
                 <a:solidFill>
                   <a:srgbClr val="7A8A95"/>
                 </a:solidFill>
@@ -3573,7 +3444,7 @@
           <a:bodyPr wrap="square" rtlCol="0" anchor="ctr"/>
           <a:lstStyle/>
           <a:p>
-            <a:pPr algn="r" indent="0" marL="0">
+            <a:pPr marL="0" indent="0" algn="r">
               <a:buNone/>
             </a:pPr>
             <a:r>
@@ -3607,6 +3478,7 @@
         <a:solidFill>
           <a:srgbClr val="FFFFFF"/>
         </a:solidFill>
+        <a:effectLst/>
       </p:bgPr>
     </p:bg>
     <p:spTree>
@@ -3644,7 +3516,7 @@
           <a:bodyPr wrap="square" lIns="0" tIns="0" rIns="0" bIns="0" rtlCol="0" anchor="t"/>
           <a:lstStyle/>
           <a:p>
-            <a:pPr indent="0" marL="0">
+            <a:pPr marL="0" indent="0">
               <a:buNone/>
             </a:pPr>
             <a:r>
@@ -3683,7 +3555,7 @@
           <a:bodyPr wrap="square" rtlCol="0" anchor="ctr"/>
           <a:lstStyle/>
           <a:p>
-            <a:pPr indent="0" marL="0">
+            <a:pPr marL="0" indent="0">
               <a:buNone/>
             </a:pPr>
             <a:r>
@@ -3727,6 +3599,13 @@
             <a:prstDash val="solid"/>
           </a:ln>
         </p:spPr>
+        <p:txBody>
+          <a:bodyPr/>
+          <a:lstStyle/>
+          <a:p>
+            <a:endParaRPr lang="de-CH"/>
+          </a:p>
+        </p:txBody>
       </p:sp>
       <p:sp>
         <p:nvSpPr>
@@ -3754,6 +3633,13 @@
             <a:prstDash val="solid"/>
           </a:ln>
         </p:spPr>
+        <p:txBody>
+          <a:bodyPr/>
+          <a:lstStyle/>
+          <a:p>
+            <a:endParaRPr lang="de-CH"/>
+          </a:p>
+        </p:txBody>
       </p:sp>
       <p:sp>
         <p:nvSpPr>
@@ -3776,7 +3662,7 @@
           <a:bodyPr wrap="square" lIns="0" tIns="0" rIns="0" bIns="0" rtlCol="0" anchor="ctr"/>
           <a:lstStyle/>
           <a:p>
-            <a:pPr indent="0" marL="0">
+            <a:pPr marL="0" indent="0">
               <a:buNone/>
             </a:pPr>
             <a:r>
@@ -3815,7 +3701,7 @@
           <a:bodyPr wrap="square" lIns="0" tIns="0" rIns="0" bIns="0" rtlCol="0" anchor="ctr"/>
           <a:lstStyle/>
           <a:p>
-            <a:pPr indent="0" marL="0">
+            <a:pPr marL="0" indent="0">
               <a:buNone/>
             </a:pPr>
             <a:r>
@@ -3854,7 +3740,7 @@
           <a:bodyPr wrap="square" lIns="0" tIns="0" rIns="0" bIns="0" rtlCol="0" anchor="t"/>
           <a:lstStyle/>
           <a:p>
-            <a:pPr indent="0" marL="0">
+            <a:pPr marL="0" indent="0">
               <a:buNone/>
             </a:pPr>
             <a:r>
@@ -3898,6 +3784,13 @@
             <a:prstDash val="solid"/>
           </a:ln>
         </p:spPr>
+        <p:txBody>
+          <a:bodyPr/>
+          <a:lstStyle/>
+          <a:p>
+            <a:endParaRPr lang="de-CH"/>
+          </a:p>
+        </p:txBody>
       </p:sp>
       <p:sp>
         <p:nvSpPr>
@@ -3925,6 +3818,13 @@
             <a:prstDash val="solid"/>
           </a:ln>
         </p:spPr>
+        <p:txBody>
+          <a:bodyPr/>
+          <a:lstStyle/>
+          <a:p>
+            <a:endParaRPr lang="de-CH"/>
+          </a:p>
+        </p:txBody>
       </p:sp>
       <p:sp>
         <p:nvSpPr>
@@ -3947,7 +3847,7 @@
           <a:bodyPr wrap="square" lIns="0" tIns="0" rIns="0" bIns="0" rtlCol="0" anchor="ctr"/>
           <a:lstStyle/>
           <a:p>
-            <a:pPr indent="0" marL="0">
+            <a:pPr marL="0" indent="0">
               <a:buNone/>
             </a:pPr>
             <a:r>
@@ -3986,7 +3886,7 @@
           <a:bodyPr wrap="square" lIns="0" tIns="0" rIns="0" bIns="0" rtlCol="0" anchor="ctr"/>
           <a:lstStyle/>
           <a:p>
-            <a:pPr indent="0" marL="0">
+            <a:pPr marL="0" indent="0">
               <a:buNone/>
             </a:pPr>
             <a:r>
@@ -4025,7 +3925,7 @@
           <a:bodyPr wrap="square" lIns="0" tIns="0" rIns="0" bIns="0" rtlCol="0" anchor="t"/>
           <a:lstStyle/>
           <a:p>
-            <a:pPr indent="0" marL="0">
+            <a:pPr marL="0" indent="0">
               <a:buNone/>
             </a:pPr>
             <a:r>
@@ -4069,6 +3969,13 @@
             <a:prstDash val="solid"/>
           </a:ln>
         </p:spPr>
+        <p:txBody>
+          <a:bodyPr/>
+          <a:lstStyle/>
+          <a:p>
+            <a:endParaRPr lang="de-CH"/>
+          </a:p>
+        </p:txBody>
       </p:sp>
       <p:sp>
         <p:nvSpPr>
@@ -4096,6 +4003,13 @@
             <a:prstDash val="solid"/>
           </a:ln>
         </p:spPr>
+        <p:txBody>
+          <a:bodyPr/>
+          <a:lstStyle/>
+          <a:p>
+            <a:endParaRPr lang="de-CH"/>
+          </a:p>
+        </p:txBody>
       </p:sp>
       <p:sp>
         <p:nvSpPr>
@@ -4118,7 +4032,7 @@
           <a:bodyPr wrap="square" lIns="0" tIns="0" rIns="0" bIns="0" rtlCol="0" anchor="ctr"/>
           <a:lstStyle/>
           <a:p>
-            <a:pPr indent="0" marL="0">
+            <a:pPr marL="0" indent="0">
               <a:buNone/>
             </a:pPr>
             <a:r>
@@ -4157,7 +4071,7 @@
           <a:bodyPr wrap="square" lIns="0" tIns="0" rIns="0" bIns="0" rtlCol="0" anchor="ctr"/>
           <a:lstStyle/>
           <a:p>
-            <a:pPr indent="0" marL="0">
+            <a:pPr marL="0" indent="0">
               <a:buNone/>
             </a:pPr>
             <a:r>
@@ -4196,7 +4110,7 @@
           <a:bodyPr wrap="square" lIns="0" tIns="0" rIns="0" bIns="0" rtlCol="0" anchor="t"/>
           <a:lstStyle/>
           <a:p>
-            <a:pPr indent="0" marL="0">
+            <a:pPr marL="0" indent="0">
               <a:buNone/>
             </a:pPr>
             <a:r>
@@ -4240,6 +4154,13 @@
             <a:prstDash val="solid"/>
           </a:ln>
         </p:spPr>
+        <p:txBody>
+          <a:bodyPr/>
+          <a:lstStyle/>
+          <a:p>
+            <a:endParaRPr lang="de-CH"/>
+          </a:p>
+        </p:txBody>
       </p:sp>
       <p:sp>
         <p:nvSpPr>
@@ -4267,6 +4188,13 @@
             <a:prstDash val="solid"/>
           </a:ln>
         </p:spPr>
+        <p:txBody>
+          <a:bodyPr/>
+          <a:lstStyle/>
+          <a:p>
+            <a:endParaRPr lang="de-CH"/>
+          </a:p>
+        </p:txBody>
       </p:sp>
       <p:sp>
         <p:nvSpPr>
@@ -4289,7 +4217,7 @@
           <a:bodyPr wrap="square" lIns="0" tIns="0" rIns="0" bIns="0" rtlCol="0" anchor="ctr"/>
           <a:lstStyle/>
           <a:p>
-            <a:pPr indent="0" marL="0">
+            <a:pPr marL="0" indent="0">
               <a:buNone/>
             </a:pPr>
             <a:r>
@@ -4328,7 +4256,7 @@
           <a:bodyPr wrap="square" lIns="0" tIns="0" rIns="0" bIns="0" rtlCol="0" anchor="ctr"/>
           <a:lstStyle/>
           <a:p>
-            <a:pPr indent="0" marL="0">
+            <a:pPr marL="0" indent="0">
               <a:buNone/>
             </a:pPr>
             <a:r>
@@ -4367,7 +4295,7 @@
           <a:bodyPr wrap="square" lIns="0" tIns="0" rIns="0" bIns="0" rtlCol="0" anchor="t"/>
           <a:lstStyle/>
           <a:p>
-            <a:pPr indent="0" marL="0">
+            <a:pPr marL="0" indent="0">
               <a:buNone/>
             </a:pPr>
             <a:r>
@@ -4406,11 +4334,11 @@
           <a:bodyPr wrap="square" rtlCol="0" anchor="ctr"/>
           <a:lstStyle/>
           <a:p>
-            <a:pPr indent="0" marL="0">
-              <a:buNone/>
-            </a:pPr>
-            <a:r>
-              <a:rPr lang="en-US" sz="900" spc="200" kern="0" dirty="0">
+            <a:pPr marL="0" indent="0">
+              <a:buNone/>
+            </a:pPr>
+            <a:r>
+              <a:rPr lang="en-US" sz="900" kern="0" spc="200" dirty="0">
                 <a:solidFill>
                   <a:srgbClr val="7A8A95"/>
                 </a:solidFill>
@@ -4445,7 +4373,7 @@
           <a:bodyPr wrap="square" rtlCol="0" anchor="ctr"/>
           <a:lstStyle/>
           <a:p>
-            <a:pPr algn="r" indent="0" marL="0">
+            <a:pPr marL="0" indent="0" algn="r">
               <a:buNone/>
             </a:pPr>
             <a:r>
@@ -4479,6 +4407,7 @@
         <a:solidFill>
           <a:srgbClr val="12828C"/>
         </a:solidFill>
+        <a:effectLst/>
       </p:bgPr>
     </p:bg>
     <p:spTree>
@@ -4503,7 +4432,7 @@
         </p:nvSpPr>
         <p:spPr>
           <a:xfrm>
-            <a:off x="548640" y="1188720"/>
+            <a:off x="548640" y="662940"/>
             <a:ext cx="8046720" cy="365760"/>
           </a:xfrm>
           <a:prstGeom prst="rect">
@@ -4516,11 +4445,11 @@
           <a:bodyPr wrap="square" rtlCol="0" anchor="ctr"/>
           <a:lstStyle/>
           <a:p>
-            <a:pPr algn="ctr" indent="0" marL="0">
-              <a:buNone/>
-            </a:pPr>
-            <a:r>
-              <a:rPr lang="en-US" sz="1100" b="1" spc="400" kern="0" dirty="0">
+            <a:pPr marL="0" indent="0" algn="ctr">
+              <a:buNone/>
+            </a:pPr>
+            <a:r>
+              <a:rPr lang="en-US" sz="1100" b="1" kern="0" spc="400" dirty="0">
                 <a:solidFill>
                   <a:srgbClr val="DC822E"/>
                 </a:solidFill>
@@ -4542,7 +4471,7 @@
         </p:nvSpPr>
         <p:spPr>
           <a:xfrm>
-            <a:off x="4297680" y="1691640"/>
+            <a:off x="4345093" y="1033780"/>
             <a:ext cx="548640" cy="36576"/>
           </a:xfrm>
           <a:prstGeom prst="rect">
@@ -4560,6 +4489,13 @@
             <a:prstDash val="solid"/>
           </a:ln>
         </p:spPr>
+        <p:txBody>
+          <a:bodyPr/>
+          <a:lstStyle/>
+          <a:p>
+            <a:endParaRPr lang="de-CH"/>
+          </a:p>
+        </p:txBody>
       </p:sp>
       <p:sp>
         <p:nvSpPr>
@@ -4569,7 +4505,7 @@
         </p:nvSpPr>
         <p:spPr>
           <a:xfrm>
-            <a:off x="548640" y="2011680"/>
+            <a:off x="548640" y="1666240"/>
             <a:ext cx="8046720" cy="2286000"/>
           </a:xfrm>
           <a:prstGeom prst="rect">
@@ -4582,7 +4518,7 @@
           <a:bodyPr wrap="square" lIns="0" tIns="0" rIns="0" bIns="0" rtlCol="0" anchor="ctr"/>
           <a:lstStyle/>
           <a:p>
-            <a:pPr algn="ctr" indent="0" marL="0">
+            <a:pPr marL="0" indent="0" algn="ctr">
               <a:buNone/>
             </a:pPr>
             <a:r>
@@ -4599,7 +4535,7 @@
             <a:endParaRPr lang="en-US" sz="3600" dirty="0"/>
           </a:p>
           <a:p>
-            <a:pPr algn="ctr" indent="0" marL="0">
+            <a:pPr marL="0" indent="0" algn="ctr">
               <a:buNone/>
             </a:pPr>
             <a:r>
@@ -4616,7 +4552,7 @@
             <a:endParaRPr lang="en-US" sz="3600" dirty="0"/>
           </a:p>
           <a:p>
-            <a:pPr algn="ctr" indent="0" marL="0">
+            <a:pPr marL="0" indent="0" algn="ctr">
               <a:buNone/>
             </a:pPr>
             <a:r>
@@ -4633,7 +4569,7 @@
             <a:endParaRPr lang="en-US" sz="3600" dirty="0"/>
           </a:p>
           <a:p>
-            <a:pPr algn="ctr" indent="0" marL="0">
+            <a:pPr marL="0" indent="0" algn="ctr">
               <a:buNone/>
             </a:pPr>
             <a:r>
@@ -4672,11 +4608,11 @@
           <a:bodyPr wrap="square" rtlCol="0" anchor="ctr"/>
           <a:lstStyle/>
           <a:p>
-            <a:pPr indent="0" marL="0">
-              <a:buNone/>
-            </a:pPr>
-            <a:r>
-              <a:rPr lang="en-US" sz="900" spc="200" kern="0" dirty="0">
+            <a:pPr marL="0" indent="0">
+              <a:buNone/>
+            </a:pPr>
+            <a:r>
+              <a:rPr lang="en-US" sz="900" kern="0" spc="200" dirty="0">
                 <a:solidFill>
                   <a:srgbClr val="F1ECDD"/>
                 </a:solidFill>
@@ -4711,7 +4647,7 @@
           <a:bodyPr wrap="square" rtlCol="0" anchor="ctr"/>
           <a:lstStyle/>
           <a:p>
-            <a:pPr algn="r" indent="0" marL="0">
+            <a:pPr marL="0" indent="0" algn="r">
               <a:buNone/>
             </a:pPr>
             <a:r>
@@ -4745,6 +4681,7 @@
         <a:solidFill>
           <a:srgbClr val="FFFFFF"/>
         </a:solidFill>
+        <a:effectLst/>
       </p:bgPr>
     </p:bg>
     <p:spTree>
@@ -4782,11 +4719,11 @@
           <a:bodyPr wrap="square" rtlCol="0" anchor="ctr"/>
           <a:lstStyle/>
           <a:p>
-            <a:pPr indent="0" marL="0">
-              <a:buNone/>
-            </a:pPr>
-            <a:r>
-              <a:rPr lang="en-US" sz="1000" b="1" spc="400" kern="0" dirty="0">
+            <a:pPr marL="0" indent="0">
+              <a:buNone/>
+            </a:pPr>
+            <a:r>
+              <a:rPr lang="en-US" sz="1000" b="1" kern="0" spc="400" dirty="0">
                 <a:solidFill>
                   <a:srgbClr val="DC822E"/>
                 </a:solidFill>
@@ -4821,11 +4758,11 @@
           <a:bodyPr wrap="square" lIns="0" tIns="0" rIns="0" bIns="0" rtlCol="0" anchor="t"/>
           <a:lstStyle/>
           <a:p>
-            <a:pPr indent="0" marL="0">
-              <a:buNone/>
-            </a:pPr>
-            <a:r>
-              <a:rPr lang="en-US" sz="3600" b="1" dirty="0">
+            <a:pPr marL="0" indent="0">
+              <a:buNone/>
+            </a:pPr>
+            <a:r>
+              <a:rPr lang="en-US" sz="3200" b="1" dirty="0">
                 <a:solidFill>
                   <a:srgbClr val="1A3A4A"/>
                 </a:solidFill>
@@ -4835,7 +4772,7 @@
               </a:rPr>
               <a:t>Aus meinem eigenen Alltag — klingt klein, summiert sich auf 5+ Stunden/Woche</a:t>
             </a:r>
-            <a:endParaRPr lang="en-US" sz="3600" dirty="0"/>
+            <a:endParaRPr lang="en-US" sz="3200" dirty="0"/>
           </a:p>
         </p:txBody>
       </p:sp>
@@ -4847,7 +4784,7 @@
         </p:nvSpPr>
         <p:spPr>
           <a:xfrm>
-            <a:off x="548640" y="1920240"/>
+            <a:off x="548640" y="2400301"/>
             <a:ext cx="5120640" cy="2194560"/>
           </a:xfrm>
           <a:prstGeom prst="rect">
@@ -4868,6 +4805,17 @@
               <a:buChar char="●"/>
             </a:pPr>
             <a:r>
+              <a:rPr lang="en-US" sz="1600" dirty="0" err="1">
+                <a:solidFill>
+                  <a:srgbClr val="2C3E50"/>
+                </a:solidFill>
+                <a:latin typeface="Calibri" pitchFamily="34" charset="0"/>
+                <a:ea typeface="Calibri" pitchFamily="34" charset="-122"/>
+                <a:cs typeface="Calibri" pitchFamily="34" charset="-120"/>
+              </a:rPr>
+              <a:t>Wäsche</a:t>
+            </a:r>
+            <a:r>
               <a:rPr lang="en-US" sz="1600" dirty="0">
                 <a:solidFill>
                   <a:srgbClr val="2C3E50"/>
@@ -4876,7 +4824,29 @@
                 <a:ea typeface="Calibri" pitchFamily="34" charset="-122"/>
                 <a:cs typeface="Calibri" pitchFamily="34" charset="-120"/>
               </a:rPr>
-              <a:t>WhatsApp-Familiengruppe stumm — lese 1× am Tag</a:t>
+              <a:t> </a:t>
+            </a:r>
+            <a:r>
+              <a:rPr lang="en-US" sz="1600" dirty="0" err="1">
+                <a:solidFill>
+                  <a:srgbClr val="2C3E50"/>
+                </a:solidFill>
+                <a:latin typeface="Calibri" pitchFamily="34" charset="0"/>
+                <a:ea typeface="Calibri" pitchFamily="34" charset="-122"/>
+                <a:cs typeface="Calibri" pitchFamily="34" charset="-120"/>
+              </a:rPr>
+              <a:t>glätten</a:t>
+            </a:r>
+            <a:r>
+              <a:rPr lang="en-US" sz="1600" dirty="0">
+                <a:solidFill>
+                  <a:srgbClr val="2C3E50"/>
+                </a:solidFill>
+                <a:latin typeface="Calibri" pitchFamily="34" charset="0"/>
+                <a:ea typeface="Calibri" pitchFamily="34" charset="-122"/>
+                <a:cs typeface="Calibri" pitchFamily="34" charset="-120"/>
+              </a:rPr>
+              <a:t> — sie ist eh wieder zerknittert in 2 Tagen</a:t>
             </a:r>
             <a:endParaRPr lang="en-US" sz="1600" dirty="0"/>
           </a:p>
@@ -4897,7 +4867,7 @@
                 <a:ea typeface="Calibri" pitchFamily="34" charset="-122"/>
                 <a:cs typeface="Calibri" pitchFamily="34" charset="-120"/>
               </a:rPr>
-              <a:t>Wäsche falten — sie ist eh wieder zerknittert in 2 Tagen</a:t>
+              <a:t>Tägliches Putzen — Wochenend-Putz reicht</a:t>
             </a:r>
             <a:endParaRPr lang="en-US" sz="1600" dirty="0"/>
           </a:p>
@@ -4918,9 +4888,93 @@
                 <a:ea typeface="Calibri" pitchFamily="34" charset="-122"/>
                 <a:cs typeface="Calibri" pitchFamily="34" charset="-120"/>
               </a:rPr>
-              <a:t>Tägliches Putzen — Wochenend-Putz reicht</a:t>
-            </a:r>
-            <a:endParaRPr lang="en-US" sz="1600" dirty="0"/>
+              <a:t>An </a:t>
+            </a:r>
+            <a:r>
+              <a:rPr lang="en-US" sz="1600" dirty="0" err="1">
+                <a:solidFill>
+                  <a:srgbClr val="2C3E50"/>
+                </a:solidFill>
+                <a:latin typeface="Calibri" pitchFamily="34" charset="0"/>
+                <a:ea typeface="Calibri" pitchFamily="34" charset="-122"/>
+                <a:cs typeface="Calibri" pitchFamily="34" charset="-120"/>
+              </a:rPr>
+              <a:t>jedes</a:t>
+            </a:r>
+            <a:r>
+              <a:rPr lang="en-US" sz="1600" dirty="0">
+                <a:solidFill>
+                  <a:srgbClr val="2C3E50"/>
+                </a:solidFill>
+                <a:latin typeface="Calibri" pitchFamily="34" charset="0"/>
+                <a:ea typeface="Calibri" pitchFamily="34" charset="-122"/>
+                <a:cs typeface="Calibri" pitchFamily="34" charset="-120"/>
+              </a:rPr>
+              <a:t> </a:t>
+            </a:r>
+            <a:r>
+              <a:rPr lang="en-US" sz="1600" dirty="0" err="1">
+                <a:solidFill>
+                  <a:srgbClr val="2C3E50"/>
+                </a:solidFill>
+                <a:latin typeface="Calibri" pitchFamily="34" charset="0"/>
+                <a:ea typeface="Calibri" pitchFamily="34" charset="-122"/>
+                <a:cs typeface="Calibri" pitchFamily="34" charset="-120"/>
+              </a:rPr>
+              <a:t>Traritrara</a:t>
+            </a:r>
+            <a:r>
+              <a:rPr lang="en-US" sz="1600" dirty="0">
+                <a:solidFill>
+                  <a:srgbClr val="2C3E50"/>
+                </a:solidFill>
+                <a:latin typeface="Calibri" pitchFamily="34" charset="0"/>
+                <a:ea typeface="Calibri" pitchFamily="34" charset="-122"/>
+                <a:cs typeface="Calibri" pitchFamily="34" charset="-120"/>
+              </a:rPr>
+              <a:t> </a:t>
+            </a:r>
+            <a:r>
+              <a:rPr lang="en-US" sz="1600" dirty="0" err="1">
+                <a:solidFill>
+                  <a:srgbClr val="2C3E50"/>
+                </a:solidFill>
+                <a:latin typeface="Calibri" pitchFamily="34" charset="0"/>
+                <a:ea typeface="Calibri" pitchFamily="34" charset="-122"/>
+                <a:cs typeface="Calibri" pitchFamily="34" charset="-120"/>
+              </a:rPr>
+              <a:t>einen</a:t>
+            </a:r>
+            <a:r>
+              <a:rPr lang="en-US" sz="1600" dirty="0">
+                <a:solidFill>
+                  <a:srgbClr val="2C3E50"/>
+                </a:solidFill>
+                <a:latin typeface="Calibri" pitchFamily="34" charset="0"/>
+                <a:ea typeface="Calibri" pitchFamily="34" charset="-122"/>
+                <a:cs typeface="Calibri" pitchFamily="34" charset="-120"/>
+              </a:rPr>
+              <a:t> Kuchen </a:t>
+            </a:r>
+            <a:r>
+              <a:rPr lang="en-US" sz="1600" dirty="0" err="1">
+                <a:solidFill>
+                  <a:srgbClr val="2C3E50"/>
+                </a:solidFill>
+                <a:latin typeface="Calibri" pitchFamily="34" charset="0"/>
+                <a:ea typeface="Calibri" pitchFamily="34" charset="-122"/>
+                <a:cs typeface="Calibri" pitchFamily="34" charset="-120"/>
+              </a:rPr>
+              <a:t>bringen</a:t>
+            </a:r>
+            <a:endParaRPr lang="en-US" sz="1600" dirty="0">
+              <a:solidFill>
+                <a:srgbClr val="2C3E50"/>
+              </a:solidFill>
+              <a:latin typeface="Calibri" pitchFamily="34" charset="0"/>
+              <a:ea typeface="Calibri" pitchFamily="34" charset="-122"/>
+              <a:cs typeface="Calibri" pitchFamily="34" charset="-120"/>
+            </a:endParaRPr>
           </a:p>
           <a:p>
             <a:pPr marL="342900" indent="-342900">
@@ -4931,38 +4985,13 @@
               <a:buChar char="●"/>
             </a:pPr>
             <a:r>
-              <a:rPr lang="en-US" sz="1600" dirty="0">
-                <a:solidFill>
-                  <a:srgbClr val="2C3E50"/>
-                </a:solidFill>
-                <a:latin typeface="Calibri" pitchFamily="34" charset="0"/>
-                <a:ea typeface="Calibri" pitchFamily="34" charset="-122"/>
-                <a:cs typeface="Calibri" pitchFamily="34" charset="-120"/>
-              </a:rPr>
-              <a:t>Geburtstagsgrüsse-Anrufe — WhatsApp-Sprachi reicht</a:t>
-            </a:r>
-            <a:endParaRPr lang="en-US" sz="1600" dirty="0"/>
-          </a:p>
-          <a:p>
-            <a:pPr marL="342900" indent="-342900">
-              <a:spcAft>
-                <a:spcPts val="800"/>
-              </a:spcAft>
-              <a:buSzPct val="100000"/>
-              <a:buChar char="●"/>
-            </a:pPr>
-            <a:r>
-              <a:rPr lang="en-US" sz="1600" dirty="0">
-                <a:solidFill>
-                  <a:srgbClr val="2C3E50"/>
-                </a:solidFill>
-                <a:latin typeface="Calibri" pitchFamily="34" charset="0"/>
-                <a:ea typeface="Calibri" pitchFamily="34" charset="-122"/>
-                <a:cs typeface="Calibri" pitchFamily="34" charset="-120"/>
-              </a:rPr>
-              <a:t>Heimat-Kantonsfest dieses Jahr → Nein gesagt</a:t>
-            </a:r>
-            <a:endParaRPr lang="en-US" sz="1600" dirty="0"/>
+              <a:rPr lang="en-US" sz="1600" dirty="0" err="1"/>
+              <a:t>Aktivitäten</a:t>
+            </a:r>
+            <a:r>
+              <a:rPr lang="en-US" sz="1600" dirty="0"/>
+              <a:t> der Kinder</a:t>
+            </a:r>
           </a:p>
         </p:txBody>
       </p:sp>
@@ -4992,6 +5021,13 @@
             <a:prstDash val="solid"/>
           </a:ln>
         </p:spPr>
+        <p:txBody>
+          <a:bodyPr/>
+          <a:lstStyle/>
+          <a:p>
+            <a:endParaRPr lang="de-CH"/>
+          </a:p>
+        </p:txBody>
       </p:sp>
       <p:sp>
         <p:nvSpPr>
@@ -5019,6 +5055,13 @@
             <a:prstDash val="solid"/>
           </a:ln>
         </p:spPr>
+        <p:txBody>
+          <a:bodyPr/>
+          <a:lstStyle/>
+          <a:p>
+            <a:endParaRPr lang="de-CH"/>
+          </a:p>
+        </p:txBody>
       </p:sp>
       <p:sp>
         <p:nvSpPr>
@@ -5041,11 +5084,11 @@
           <a:bodyPr wrap="square" rtlCol="0" anchor="ctr"/>
           <a:lstStyle/>
           <a:p>
-            <a:pPr indent="0" marL="0">
-              <a:buNone/>
-            </a:pPr>
-            <a:r>
-              <a:rPr lang="en-US" sz="900" b="1" spc="400" kern="0" dirty="0">
+            <a:pPr marL="0" indent="0">
+              <a:buNone/>
+            </a:pPr>
+            <a:r>
+              <a:rPr lang="en-US" sz="900" b="1" kern="0" spc="400" dirty="0">
                 <a:solidFill>
                   <a:srgbClr val="DC822E"/>
                 </a:solidFill>
@@ -5080,7 +5123,7 @@
           <a:bodyPr wrap="square" lIns="0" tIns="0" rIns="0" bIns="0" rtlCol="0" anchor="t"/>
           <a:lstStyle/>
           <a:p>
-            <a:pPr indent="0" marL="0">
+            <a:pPr marL="0" indent="0">
               <a:buNone/>
             </a:pPr>
             <a:r>
@@ -5119,11 +5162,11 @@
           <a:bodyPr wrap="square" rtlCol="0" anchor="ctr"/>
           <a:lstStyle/>
           <a:p>
-            <a:pPr indent="0" marL="0">
-              <a:buNone/>
-            </a:pPr>
-            <a:r>
-              <a:rPr lang="en-US" sz="900" spc="200" kern="0" dirty="0">
+            <a:pPr marL="0" indent="0">
+              <a:buNone/>
+            </a:pPr>
+            <a:r>
+              <a:rPr lang="en-US" sz="900" kern="0" spc="200" dirty="0">
                 <a:solidFill>
                   <a:srgbClr val="7A8A95"/>
                 </a:solidFill>
@@ -5158,7 +5201,7 @@
           <a:bodyPr wrap="square" rtlCol="0" anchor="ctr"/>
           <a:lstStyle/>
           <a:p>
-            <a:pPr algn="r" indent="0" marL="0">
+            <a:pPr marL="0" indent="0" algn="r">
               <a:buNone/>
             </a:pPr>
             <a:r>
@@ -5192,6 +5235,7 @@
         <a:solidFill>
           <a:srgbClr val="FFFFFF"/>
         </a:solidFill>
+        <a:effectLst/>
       </p:bgPr>
     </p:bg>
     <p:spTree>
@@ -5229,7 +5273,7 @@
           <a:bodyPr wrap="square" lIns="0" tIns="0" rIns="0" bIns="0" rtlCol="0" anchor="t"/>
           <a:lstStyle/>
           <a:p>
-            <a:pPr indent="0" marL="0">
+            <a:pPr marL="0" indent="0">
               <a:buNone/>
             </a:pPr>
             <a:r>
@@ -5273,6 +5317,13 @@
             <a:prstDash val="solid"/>
           </a:ln>
         </p:spPr>
+        <p:txBody>
+          <a:bodyPr/>
+          <a:lstStyle/>
+          <a:p>
+            <a:endParaRPr lang="de-CH"/>
+          </a:p>
+        </p:txBody>
       </p:sp>
       <p:sp>
         <p:nvSpPr>
@@ -5295,7 +5346,7 @@
           <a:bodyPr wrap="square" lIns="0" tIns="0" rIns="0" bIns="0" rtlCol="0" anchor="ctr"/>
           <a:lstStyle/>
           <a:p>
-            <a:pPr algn="ctr" indent="0" marL="0">
+            <a:pPr marL="0" indent="0" algn="ctr">
               <a:buNone/>
             </a:pPr>
             <a:r>
@@ -5339,6 +5390,13 @@
             <a:prstDash val="solid"/>
           </a:ln>
         </p:spPr>
+        <p:txBody>
+          <a:bodyPr/>
+          <a:lstStyle/>
+          <a:p>
+            <a:endParaRPr lang="de-CH"/>
+          </a:p>
+        </p:txBody>
       </p:sp>
       <p:sp>
         <p:nvSpPr>
@@ -5361,7 +5419,7 @@
           <a:bodyPr wrap="square" lIns="0" tIns="0" rIns="0" bIns="0" rtlCol="0" anchor="t"/>
           <a:lstStyle/>
           <a:p>
-            <a:pPr indent="0" marL="0">
+            <a:pPr marL="0" indent="0">
               <a:buNone/>
             </a:pPr>
             <a:r>
@@ -5400,7 +5458,7 @@
           <a:bodyPr wrap="square" lIns="0" tIns="0" rIns="0" bIns="0" rtlCol="0" anchor="t"/>
           <a:lstStyle/>
           <a:p>
-            <a:pPr indent="0" marL="0">
+            <a:pPr marL="0" indent="0">
               <a:buNone/>
             </a:pPr>
             <a:r>
@@ -5417,7 +5475,7 @@
             <a:endParaRPr lang="en-US" sz="1400" dirty="0"/>
           </a:p>
           <a:p>
-            <a:pPr indent="0" marL="0">
+            <a:pPr marL="0" indent="0">
               <a:buNone/>
             </a:pPr>
             <a:r>
@@ -5461,6 +5519,13 @@
             <a:prstDash val="solid"/>
           </a:ln>
         </p:spPr>
+        <p:txBody>
+          <a:bodyPr/>
+          <a:lstStyle/>
+          <a:p>
+            <a:endParaRPr lang="de-CH"/>
+          </a:p>
+        </p:txBody>
       </p:sp>
       <p:sp>
         <p:nvSpPr>
@@ -5483,7 +5548,7 @@
           <a:bodyPr wrap="square" lIns="0" tIns="0" rIns="0" bIns="0" rtlCol="0" anchor="ctr"/>
           <a:lstStyle/>
           <a:p>
-            <a:pPr algn="ctr" indent="0" marL="0">
+            <a:pPr marL="0" indent="0" algn="ctr">
               <a:buNone/>
             </a:pPr>
             <a:r>
@@ -5527,6 +5592,13 @@
             <a:prstDash val="solid"/>
           </a:ln>
         </p:spPr>
+        <p:txBody>
+          <a:bodyPr/>
+          <a:lstStyle/>
+          <a:p>
+            <a:endParaRPr lang="de-CH"/>
+          </a:p>
+        </p:txBody>
       </p:sp>
       <p:sp>
         <p:nvSpPr>
@@ -5549,7 +5621,7 @@
           <a:bodyPr wrap="square" lIns="0" tIns="0" rIns="0" bIns="0" rtlCol="0" anchor="t"/>
           <a:lstStyle/>
           <a:p>
-            <a:pPr indent="0" marL="0">
+            <a:pPr marL="0" indent="0">
               <a:buNone/>
             </a:pPr>
             <a:r>
@@ -5588,7 +5660,7 @@
           <a:bodyPr wrap="square" lIns="0" tIns="0" rIns="0" bIns="0" rtlCol="0" anchor="t"/>
           <a:lstStyle/>
           <a:p>
-            <a:pPr indent="0" marL="0">
+            <a:pPr marL="0" indent="0">
               <a:buNone/>
             </a:pPr>
             <a:r>
@@ -5600,20 +5672,19 @@
                 <a:ea typeface="Calibri" pitchFamily="34" charset="-122"/>
                 <a:cs typeface="Calibri" pitchFamily="34" charset="-120"/>
               </a:rPr>
-              <a:t>Ab 6: Tischabräumen · Wäsche-Korb · Schulranzen-Vorbereitung</a:t>
-            </a:r>
-            <a:endParaRPr lang="en-US" sz="1400" dirty="0"/>
-          </a:p>
-          <a:p>
-            <a:pPr indent="0" marL="0">
-              <a:buNone/>
-            </a:pPr>
-            <a:endParaRPr lang="en-US" sz="1400" dirty="0"/>
-          </a:p>
-          <a:p>
-            <a:pPr indent="0" marL="0">
-              <a:buNone/>
-            </a:pPr>
+              <a:t>Die Kinder </a:t>
+            </a:r>
+            <a:r>
+              <a:rPr lang="en-US" sz="1400" dirty="0" err="1">
+                <a:solidFill>
+                  <a:srgbClr val="2C3E50"/>
+                </a:solidFill>
+                <a:latin typeface="Calibri" pitchFamily="34" charset="0"/>
+                <a:ea typeface="Calibri" pitchFamily="34" charset="-122"/>
+                <a:cs typeface="Calibri" pitchFamily="34" charset="-120"/>
+              </a:rPr>
+              <a:t>sollen</a:t>
+            </a:r>
             <a:r>
               <a:rPr lang="en-US" sz="1400" dirty="0">
                 <a:solidFill>
@@ -5623,20 +5694,19 @@
                 <a:ea typeface="Calibri" pitchFamily="34" charset="-122"/>
                 <a:cs typeface="Calibri" pitchFamily="34" charset="-120"/>
               </a:rPr>
-              <a:t>Ab 10: Müll · eigene Aufgaben</a:t>
-            </a:r>
-            <a:endParaRPr lang="en-US" sz="1400" dirty="0"/>
-          </a:p>
-          <a:p>
-            <a:pPr indent="0" marL="0">
-              <a:buNone/>
-            </a:pPr>
-            <a:endParaRPr lang="en-US" sz="1400" dirty="0"/>
-          </a:p>
-          <a:p>
-            <a:pPr indent="0" marL="0">
-              <a:buNone/>
-            </a:pPr>
+              <a:t> und </a:t>
+            </a:r>
+            <a:r>
+              <a:rPr lang="en-US" sz="1400" dirty="0" err="1">
+                <a:solidFill>
+                  <a:srgbClr val="2C3E50"/>
+                </a:solidFill>
+                <a:latin typeface="Calibri" pitchFamily="34" charset="0"/>
+                <a:ea typeface="Calibri" pitchFamily="34" charset="-122"/>
+                <a:cs typeface="Calibri" pitchFamily="34" charset="-120"/>
+              </a:rPr>
+              <a:t>dürfen</a:t>
+            </a:r>
             <a:r>
               <a:rPr lang="en-US" sz="1400" dirty="0">
                 <a:solidFill>
@@ -5646,7 +5716,18 @@
                 <a:ea typeface="Calibri" pitchFamily="34" charset="-122"/>
                 <a:cs typeface="Calibri" pitchFamily="34" charset="-120"/>
               </a:rPr>
-              <a:t>Ab 12: kochen · Einkauf</a:t>
+              <a:t> </a:t>
+            </a:r>
+            <a:r>
+              <a:rPr lang="en-US" sz="1400" dirty="0" err="1">
+                <a:solidFill>
+                  <a:srgbClr val="2C3E50"/>
+                </a:solidFill>
+                <a:latin typeface="Calibri" pitchFamily="34" charset="0"/>
+                <a:ea typeface="Calibri" pitchFamily="34" charset="-122"/>
+                <a:cs typeface="Calibri" pitchFamily="34" charset="-120"/>
+              </a:rPr>
+              <a:t>mithelfen</a:t>
             </a:r>
             <a:endParaRPr lang="en-US" sz="1400" dirty="0"/>
           </a:p>
@@ -5678,6 +5759,13 @@
             <a:prstDash val="solid"/>
           </a:ln>
         </p:spPr>
+        <p:txBody>
+          <a:bodyPr/>
+          <a:lstStyle/>
+          <a:p>
+            <a:endParaRPr lang="de-CH"/>
+          </a:p>
+        </p:txBody>
       </p:sp>
       <p:sp>
         <p:nvSpPr>
@@ -5700,7 +5788,7 @@
           <a:bodyPr wrap="square" lIns="0" tIns="0" rIns="0" bIns="0" rtlCol="0" anchor="ctr"/>
           <a:lstStyle/>
           <a:p>
-            <a:pPr algn="ctr" indent="0" marL="0">
+            <a:pPr marL="0" indent="0" algn="ctr">
               <a:buNone/>
             </a:pPr>
             <a:r>
@@ -5744,6 +5832,13 @@
             <a:prstDash val="solid"/>
           </a:ln>
         </p:spPr>
+        <p:txBody>
+          <a:bodyPr/>
+          <a:lstStyle/>
+          <a:p>
+            <a:endParaRPr lang="de-CH"/>
+          </a:p>
+        </p:txBody>
       </p:sp>
       <p:sp>
         <p:nvSpPr>
@@ -5766,7 +5861,7 @@
           <a:bodyPr wrap="square" lIns="0" tIns="0" rIns="0" bIns="0" rtlCol="0" anchor="t"/>
           <a:lstStyle/>
           <a:p>
-            <a:pPr indent="0" marL="0">
+            <a:pPr marL="0" indent="0">
               <a:buNone/>
             </a:pPr>
             <a:r>
@@ -5805,7 +5900,7 @@
           <a:bodyPr wrap="square" lIns="0" tIns="0" rIns="0" bIns="0" rtlCol="0" anchor="t"/>
           <a:lstStyle/>
           <a:p>
-            <a:pPr indent="0" marL="0">
+            <a:pPr marL="0" indent="0">
               <a:buNone/>
             </a:pPr>
             <a:r>
@@ -5822,13 +5917,13 @@
             <a:endParaRPr lang="en-US" sz="1400" dirty="0"/>
           </a:p>
           <a:p>
-            <a:pPr indent="0" marL="0">
+            <a:pPr marL="0" indent="0">
               <a:buNone/>
             </a:pPr>
             <a:endParaRPr lang="en-US" sz="1400" dirty="0"/>
           </a:p>
           <a:p>
-            <a:pPr indent="0" marL="0">
+            <a:pPr marL="0" indent="0">
               <a:buNone/>
             </a:pPr>
             <a:r>
@@ -5840,7 +5935,45 @@
                 <a:ea typeface="Calibri" pitchFamily="34" charset="-122"/>
                 <a:cs typeface="Calibri" pitchFamily="34" charset="-120"/>
               </a:rPr>
-              <a:t>Externe: Putzkraft 2×/Monat · Migros-Lieferung · Babysitter für Date</a:t>
+              <a:t>Externe: Putzkraft 2×/Monat Migros-</a:t>
+            </a:r>
+            <a:r>
+              <a:rPr lang="en-US" sz="1400" dirty="0" err="1">
+                <a:solidFill>
+                  <a:srgbClr val="2C3E50"/>
+                </a:solidFill>
+                <a:latin typeface="Calibri" pitchFamily="34" charset="0"/>
+                <a:ea typeface="Calibri" pitchFamily="34" charset="-122"/>
+                <a:cs typeface="Calibri" pitchFamily="34" charset="-120"/>
+              </a:rPr>
+              <a:t>Lieferung</a:t>
+            </a:r>
+            <a:r>
+              <a:rPr lang="en-US" sz="1400" dirty="0">
+                <a:solidFill>
+                  <a:srgbClr val="2C3E50"/>
+                </a:solidFill>
+                <a:latin typeface="Calibri" pitchFamily="34" charset="0"/>
+                <a:ea typeface="Calibri" pitchFamily="34" charset="-122"/>
+                <a:cs typeface="Calibri" pitchFamily="34" charset="-120"/>
+              </a:rPr>
+              <a:t> </a:t>
+            </a:r>
+          </a:p>
+          <a:p>
+            <a:pPr marL="0" indent="0">
+              <a:buNone/>
+            </a:pPr>
+            <a:r>
+              <a:rPr lang="en-US" sz="1400" dirty="0">
+                <a:solidFill>
+                  <a:srgbClr val="2C3E50"/>
+                </a:solidFill>
+                <a:latin typeface="Calibri" pitchFamily="34" charset="0"/>
+                <a:ea typeface="Calibri" pitchFamily="34" charset="-122"/>
+                <a:cs typeface="Calibri" pitchFamily="34" charset="-120"/>
+              </a:rPr>
+              <a:t>Babysitter für Date</a:t>
             </a:r>
             <a:endParaRPr lang="en-US" sz="1400" dirty="0"/>
           </a:p>
@@ -5867,11 +6000,11 @@
           <a:bodyPr wrap="square" rtlCol="0" anchor="ctr"/>
           <a:lstStyle/>
           <a:p>
-            <a:pPr indent="0" marL="0">
-              <a:buNone/>
-            </a:pPr>
-            <a:r>
-              <a:rPr lang="en-US" sz="900" spc="200" kern="0" dirty="0">
+            <a:pPr marL="0" indent="0">
+              <a:buNone/>
+            </a:pPr>
+            <a:r>
+              <a:rPr lang="en-US" sz="900" kern="0" spc="200" dirty="0">
                 <a:solidFill>
                   <a:srgbClr val="7A8A95"/>
                 </a:solidFill>
@@ -5906,7 +6039,7 @@
           <a:bodyPr wrap="square" rtlCol="0" anchor="ctr"/>
           <a:lstStyle/>
           <a:p>
-            <a:pPr algn="r" indent="0" marL="0">
+            <a:pPr marL="0" indent="0" algn="r">
               <a:buNone/>
             </a:pPr>
             <a:r>
@@ -5940,6 +6073,7 @@
         <a:solidFill>
           <a:srgbClr val="FFFFFF"/>
         </a:solidFill>
+        <a:effectLst/>
       </p:bgPr>
     </p:bg>
     <p:spTree>
@@ -5977,7 +6111,7 @@
           <a:bodyPr wrap="square" lIns="0" tIns="0" rIns="0" bIns="0" rtlCol="0" anchor="t"/>
           <a:lstStyle/>
           <a:p>
-            <a:pPr indent="0" marL="0">
+            <a:pPr marL="0" indent="0">
               <a:buNone/>
             </a:pPr>
             <a:r>
@@ -6016,7 +6150,7 @@
           <a:bodyPr wrap="square" rtlCol="0" anchor="ctr"/>
           <a:lstStyle/>
           <a:p>
-            <a:pPr indent="0" marL="0">
+            <a:pPr marL="0" indent="0">
               <a:buNone/>
             </a:pPr>
             <a:r>
@@ -6060,6 +6194,13 @@
             <a:prstDash val="solid"/>
           </a:ln>
         </p:spPr>
+        <p:txBody>
+          <a:bodyPr/>
+          <a:lstStyle/>
+          <a:p>
+            <a:endParaRPr lang="de-CH"/>
+          </a:p>
+        </p:txBody>
       </p:sp>
       <p:sp>
         <p:nvSpPr>
@@ -6082,7 +6223,7 @@
           <a:bodyPr wrap="square" lIns="0" tIns="0" rIns="0" bIns="0" rtlCol="0" anchor="ctr"/>
           <a:lstStyle/>
           <a:p>
-            <a:pPr algn="ctr" indent="0" marL="0">
+            <a:pPr marL="0" indent="0" algn="ctr">
               <a:buNone/>
             </a:pPr>
             <a:r>
@@ -6121,7 +6262,7 @@
           <a:bodyPr wrap="square" lIns="0" tIns="0" rIns="0" bIns="0" rtlCol="0" anchor="ctr"/>
           <a:lstStyle/>
           <a:p>
-            <a:pPr indent="0" marL="0">
+            <a:pPr marL="0" indent="0">
               <a:buNone/>
             </a:pPr>
             <a:r>
@@ -6165,6 +6306,13 @@
             <a:prstDash val="solid"/>
           </a:ln>
         </p:spPr>
+        <p:txBody>
+          <a:bodyPr/>
+          <a:lstStyle/>
+          <a:p>
+            <a:endParaRPr lang="de-CH"/>
+          </a:p>
+        </p:txBody>
       </p:sp>
       <p:sp>
         <p:nvSpPr>
@@ -6187,7 +6335,7 @@
           <a:bodyPr wrap="square" lIns="0" tIns="0" rIns="0" bIns="0" rtlCol="0" anchor="ctr"/>
           <a:lstStyle/>
           <a:p>
-            <a:pPr algn="ctr" indent="0" marL="0">
+            <a:pPr marL="0" indent="0" algn="ctr">
               <a:buNone/>
             </a:pPr>
             <a:r>
@@ -6226,7 +6374,7 @@
           <a:bodyPr wrap="square" lIns="0" tIns="0" rIns="0" bIns="0" rtlCol="0" anchor="ctr"/>
           <a:lstStyle/>
           <a:p>
-            <a:pPr indent="0" marL="0">
+            <a:pPr marL="0" indent="0">
               <a:buNone/>
             </a:pPr>
             <a:r>
@@ -6270,6 +6418,13 @@
             <a:prstDash val="solid"/>
           </a:ln>
         </p:spPr>
+        <p:txBody>
+          <a:bodyPr/>
+          <a:lstStyle/>
+          <a:p>
+            <a:endParaRPr lang="de-CH"/>
+          </a:p>
+        </p:txBody>
       </p:sp>
       <p:sp>
         <p:nvSpPr>
@@ -6292,7 +6447,7 @@
           <a:bodyPr wrap="square" lIns="0" tIns="0" rIns="0" bIns="0" rtlCol="0" anchor="ctr"/>
           <a:lstStyle/>
           <a:p>
-            <a:pPr algn="ctr" indent="0" marL="0">
+            <a:pPr marL="0" indent="0" algn="ctr">
               <a:buNone/>
             </a:pPr>
             <a:r>
@@ -6331,7 +6486,7 @@
           <a:bodyPr wrap="square" lIns="0" tIns="0" rIns="0" bIns="0" rtlCol="0" anchor="ctr"/>
           <a:lstStyle/>
           <a:p>
-            <a:pPr indent="0" marL="0">
+            <a:pPr marL="0" indent="0">
               <a:buNone/>
             </a:pPr>
             <a:r>
@@ -6375,6 +6530,13 @@
             <a:prstDash val="solid"/>
           </a:ln>
         </p:spPr>
+        <p:txBody>
+          <a:bodyPr/>
+          <a:lstStyle/>
+          <a:p>
+            <a:endParaRPr lang="de-CH"/>
+          </a:p>
+        </p:txBody>
       </p:sp>
       <p:sp>
         <p:nvSpPr>
@@ -6397,7 +6559,7 @@
           <a:bodyPr wrap="square" lIns="0" tIns="0" rIns="0" bIns="0" rtlCol="0" anchor="ctr"/>
           <a:lstStyle/>
           <a:p>
-            <a:pPr algn="ctr" indent="0" marL="0">
+            <a:pPr marL="0" indent="0" algn="ctr">
               <a:buNone/>
             </a:pPr>
             <a:r>
@@ -6436,7 +6598,7 @@
           <a:bodyPr wrap="square" lIns="0" tIns="0" rIns="0" bIns="0" rtlCol="0" anchor="ctr"/>
           <a:lstStyle/>
           <a:p>
-            <a:pPr indent="0" marL="0">
+            <a:pPr marL="0" indent="0">
               <a:buNone/>
             </a:pPr>
             <a:r>
@@ -6480,6 +6642,13 @@
             <a:prstDash val="solid"/>
           </a:ln>
         </p:spPr>
+        <p:txBody>
+          <a:bodyPr/>
+          <a:lstStyle/>
+          <a:p>
+            <a:endParaRPr lang="de-CH"/>
+          </a:p>
+        </p:txBody>
       </p:sp>
       <p:sp>
         <p:nvSpPr>
@@ -6502,7 +6671,7 @@
           <a:bodyPr wrap="square" lIns="0" tIns="0" rIns="0" bIns="0" rtlCol="0" anchor="ctr"/>
           <a:lstStyle/>
           <a:p>
-            <a:pPr algn="ctr" indent="0" marL="0">
+            <a:pPr marL="0" indent="0" algn="ctr">
               <a:buNone/>
             </a:pPr>
             <a:r>
@@ -6541,7 +6710,7 @@
           <a:bodyPr wrap="square" lIns="0" tIns="0" rIns="0" bIns="0" rtlCol="0" anchor="ctr"/>
           <a:lstStyle/>
           <a:p>
-            <a:pPr indent="0" marL="0">
+            <a:pPr marL="0" indent="0">
               <a:buNone/>
             </a:pPr>
             <a:r>
@@ -6580,11 +6749,11 @@
           <a:bodyPr wrap="square" rtlCol="0" anchor="ctr"/>
           <a:lstStyle/>
           <a:p>
-            <a:pPr indent="0" marL="0">
-              <a:buNone/>
-            </a:pPr>
-            <a:r>
-              <a:rPr lang="en-US" sz="900" spc="200" kern="0" dirty="0">
+            <a:pPr marL="0" indent="0">
+              <a:buNone/>
+            </a:pPr>
+            <a:r>
+              <a:rPr lang="en-US" sz="900" kern="0" spc="200" dirty="0">
                 <a:solidFill>
                   <a:srgbClr val="7A8A95"/>
                 </a:solidFill>
@@ -6619,7 +6788,7 @@
           <a:bodyPr wrap="square" rtlCol="0" anchor="ctr"/>
           <a:lstStyle/>
           <a:p>
-            <a:pPr algn="r" indent="0" marL="0">
+            <a:pPr marL="0" indent="0" algn="r">
               <a:buNone/>
             </a:pPr>
             <a:r>
@@ -6653,6 +6822,7 @@
         <a:solidFill>
           <a:srgbClr val="FFFFFF"/>
         </a:solidFill>
+        <a:effectLst/>
       </p:bgPr>
     </p:bg>
     <p:spTree>
@@ -6690,11 +6860,11 @@
           <a:bodyPr wrap="square" rtlCol="0" anchor="ctr"/>
           <a:lstStyle/>
           <a:p>
-            <a:pPr indent="0" marL="0">
-              <a:buNone/>
-            </a:pPr>
-            <a:r>
-              <a:rPr lang="en-US" sz="1000" b="1" spc="400" kern="0" dirty="0">
+            <a:pPr marL="0" indent="0">
+              <a:buNone/>
+            </a:pPr>
+            <a:r>
+              <a:rPr lang="en-US" sz="1000" b="1" kern="0" spc="400" dirty="0">
                 <a:solidFill>
                   <a:srgbClr val="DC822E"/>
                 </a:solidFill>
@@ -6729,7 +6899,7 @@
           <a:bodyPr wrap="square" lIns="0" tIns="0" rIns="0" bIns="0" rtlCol="0" anchor="t"/>
           <a:lstStyle/>
           <a:p>
-            <a:pPr indent="0" marL="0">
+            <a:pPr marL="0" indent="0">
               <a:buNone/>
             </a:pPr>
             <a:r>
@@ -6847,7 +7017,18 @@
                 <a:ea typeface="Calibri" pitchFamily="34" charset="-122"/>
                 <a:cs typeface="Calibri" pitchFamily="34" charset="-120"/>
               </a:rPr>
-              <a:t>Sonntag-Wochenplan-Mail an alle</a:t>
+              <a:t>Sonntag-</a:t>
+            </a:r>
+            <a:r>
+              <a:rPr lang="en-US" sz="1600" dirty="0" err="1">
+                <a:solidFill>
+                  <a:srgbClr val="2C3E50"/>
+                </a:solidFill>
+                <a:latin typeface="Calibri" pitchFamily="34" charset="0"/>
+                <a:ea typeface="Calibri" pitchFamily="34" charset="-122"/>
+                <a:cs typeface="Calibri" pitchFamily="34" charset="-120"/>
+              </a:rPr>
+              <a:t>Wochenplan</a:t>
             </a:r>
             <a:endParaRPr lang="en-US" sz="1600" dirty="0"/>
           </a:p>
@@ -6900,6 +7081,13 @@
             <a:prstDash val="solid"/>
           </a:ln>
         </p:spPr>
+        <p:txBody>
+          <a:bodyPr/>
+          <a:lstStyle/>
+          <a:p>
+            <a:endParaRPr lang="de-CH"/>
+          </a:p>
+        </p:txBody>
       </p:sp>
       <p:sp>
         <p:nvSpPr>
@@ -6927,6 +7115,13 @@
             <a:prstDash val="solid"/>
           </a:ln>
         </p:spPr>
+        <p:txBody>
+          <a:bodyPr/>
+          <a:lstStyle/>
+          <a:p>
+            <a:endParaRPr lang="de-CH"/>
+          </a:p>
+        </p:txBody>
       </p:sp>
       <p:sp>
         <p:nvSpPr>
@@ -6949,11 +7144,11 @@
           <a:bodyPr wrap="square" rtlCol="0" anchor="ctr"/>
           <a:lstStyle/>
           <a:p>
-            <a:pPr indent="0" marL="0">
-              <a:buNone/>
-            </a:pPr>
-            <a:r>
-              <a:rPr lang="en-US" sz="900" b="1" spc="400" kern="0" dirty="0">
+            <a:pPr marL="0" indent="0">
+              <a:buNone/>
+            </a:pPr>
+            <a:r>
+              <a:rPr lang="en-US" sz="900" b="1" kern="0" spc="400" dirty="0">
                 <a:solidFill>
                   <a:srgbClr val="DC822E"/>
                 </a:solidFill>
@@ -6988,7 +7183,7 @@
           <a:bodyPr wrap="square" lIns="0" tIns="0" rIns="0" bIns="0" rtlCol="0" anchor="t"/>
           <a:lstStyle/>
           <a:p>
-            <a:pPr indent="0" marL="0">
+            <a:pPr marL="0" indent="0">
               <a:buNone/>
             </a:pPr>
             <a:r>
@@ -7027,11 +7222,11 @@
           <a:bodyPr wrap="square" rtlCol="0" anchor="ctr"/>
           <a:lstStyle/>
           <a:p>
-            <a:pPr indent="0" marL="0">
-              <a:buNone/>
-            </a:pPr>
-            <a:r>
-              <a:rPr lang="en-US" sz="900" spc="200" kern="0" dirty="0">
+            <a:pPr marL="0" indent="0">
+              <a:buNone/>
+            </a:pPr>
+            <a:r>
+              <a:rPr lang="en-US" sz="900" kern="0" spc="200" dirty="0">
                 <a:solidFill>
                   <a:srgbClr val="7A8A95"/>
                 </a:solidFill>
@@ -7066,7 +7261,7 @@
           <a:bodyPr wrap="square" rtlCol="0" anchor="ctr"/>
           <a:lstStyle/>
           <a:p>
-            <a:pPr algn="r" indent="0" marL="0">
+            <a:pPr marL="0" indent="0" algn="r">
               <a:buNone/>
             </a:pPr>
             <a:r>
@@ -7100,6 +7295,7 @@
         <a:solidFill>
           <a:srgbClr val="12828C"/>
         </a:solidFill>
+        <a:effectLst/>
       </p:bgPr>
     </p:bg>
     <p:spTree>
@@ -7124,7 +7320,7 @@
         </p:nvSpPr>
         <p:spPr>
           <a:xfrm>
-            <a:off x="548640" y="1188720"/>
+            <a:off x="548640" y="274320"/>
             <a:ext cx="8046720" cy="365760"/>
           </a:xfrm>
           <a:prstGeom prst="rect">
@@ -7137,11 +7333,11 @@
           <a:bodyPr wrap="square" rtlCol="0" anchor="ctr"/>
           <a:lstStyle/>
           <a:p>
-            <a:pPr algn="ctr" indent="0" marL="0">
-              <a:buNone/>
-            </a:pPr>
-            <a:r>
-              <a:rPr lang="en-US" sz="1100" b="1" spc="400" kern="0" dirty="0">
+            <a:pPr marL="0" indent="0" algn="ctr">
+              <a:buNone/>
+            </a:pPr>
+            <a:r>
+              <a:rPr lang="en-US" sz="1100" b="1" kern="0" spc="400" dirty="0">
                 <a:solidFill>
                   <a:srgbClr val="DC822E"/>
                 </a:solidFill>
@@ -7163,7 +7359,7 @@
         </p:nvSpPr>
         <p:spPr>
           <a:xfrm>
-            <a:off x="4297680" y="1691640"/>
+            <a:off x="4196080" y="695960"/>
             <a:ext cx="548640" cy="36576"/>
           </a:xfrm>
           <a:prstGeom prst="rect">
@@ -7181,6 +7377,13 @@
             <a:prstDash val="solid"/>
           </a:ln>
         </p:spPr>
+        <p:txBody>
+          <a:bodyPr/>
+          <a:lstStyle/>
+          <a:p>
+            <a:endParaRPr lang="de-CH"/>
+          </a:p>
+        </p:txBody>
       </p:sp>
       <p:sp>
         <p:nvSpPr>
@@ -7190,7 +7393,7 @@
         </p:nvSpPr>
         <p:spPr>
           <a:xfrm>
-            <a:off x="548640" y="2011680"/>
+            <a:off x="548640" y="1815253"/>
             <a:ext cx="8046720" cy="2286000"/>
           </a:xfrm>
           <a:prstGeom prst="rect">
@@ -7203,11 +7406,11 @@
           <a:bodyPr wrap="square" lIns="0" tIns="0" rIns="0" bIns="0" rtlCol="0" anchor="ctr"/>
           <a:lstStyle/>
           <a:p>
-            <a:pPr algn="ctr" indent="0" marL="0">
-              <a:buNone/>
-            </a:pPr>
-            <a:r>
-              <a:rPr lang="en-US" sz="3600" b="1" dirty="0">
+            <a:pPr marL="0" indent="0" algn="ctr">
+              <a:buNone/>
+            </a:pPr>
+            <a:r>
+              <a:rPr lang="en-US" sz="2800" b="1" dirty="0">
                 <a:solidFill>
                   <a:srgbClr val="F1ECDD"/>
                 </a:solidFill>
@@ -7217,14 +7420,14 @@
               </a:rPr>
               <a:t>Heute kein unrealistisches Ziel.</a:t>
             </a:r>
-            <a:endParaRPr lang="en-US" sz="3600" dirty="0"/>
-          </a:p>
-          <a:p>
-            <a:pPr algn="ctr" indent="0" marL="0">
-              <a:buNone/>
-            </a:pPr>
-            <a:r>
-              <a:rPr lang="en-US" sz="3600" b="1" dirty="0">
+            <a:endParaRPr lang="en-US" sz="2800" dirty="0"/>
+          </a:p>
+          <a:p>
+            <a:pPr marL="0" indent="0" algn="ctr">
+              <a:buNone/>
+            </a:pPr>
+            <a:r>
+              <a:rPr lang="en-US" sz="2800" b="1" dirty="0">
                 <a:solidFill>
                   <a:srgbClr val="F1ECDD"/>
                 </a:solidFill>
@@ -7234,14 +7437,14 @@
               </a:rPr>
               <a:t>Pro Rolle: 1 Aufgabe diese Woche WEG —</a:t>
             </a:r>
-            <a:endParaRPr lang="en-US" sz="3600" dirty="0"/>
-          </a:p>
-          <a:p>
-            <a:pPr algn="ctr" indent="0" marL="0">
-              <a:buNone/>
-            </a:pPr>
-            <a:r>
-              <a:rPr lang="en-US" sz="3600" b="1" dirty="0">
+            <a:endParaRPr lang="en-US" sz="2800" dirty="0"/>
+          </a:p>
+          <a:p>
+            <a:pPr marL="0" indent="0" algn="ctr">
+              <a:buNone/>
+            </a:pPr>
+            <a:r>
+              <a:rPr lang="en-US" sz="2800" b="1" dirty="0">
                 <a:solidFill>
                   <a:srgbClr val="F1ECDD"/>
                 </a:solidFill>
@@ -7251,14 +7454,14 @@
               </a:rPr>
               <a:t>delegiert · automatisiert · aufgehört.</a:t>
             </a:r>
-            <a:endParaRPr lang="en-US" sz="3600" dirty="0"/>
-          </a:p>
-          <a:p>
-            <a:pPr algn="ctr" indent="0" marL="0">
-              <a:buNone/>
-            </a:pPr>
-            <a:r>
-              <a:rPr lang="en-US" sz="3600" b="1" dirty="0">
+            <a:endParaRPr lang="en-US" sz="2800" dirty="0"/>
+          </a:p>
+          <a:p>
+            <a:pPr marL="0" indent="0" algn="ctr">
+              <a:buNone/>
+            </a:pPr>
+            <a:r>
+              <a:rPr lang="en-US" sz="2800" b="1" dirty="0">
                 <a:solidFill>
                   <a:srgbClr val="F1ECDD"/>
                 </a:solidFill>
@@ -7268,7 +7471,7 @@
               </a:rPr>
               <a:t>7 Rollen = 7 Aufgaben weg = 3–5 Stunden zurück.</a:t>
             </a:r>
-            <a:endParaRPr lang="en-US" sz="3600" dirty="0"/>
+            <a:endParaRPr lang="en-US" sz="2800" dirty="0"/>
           </a:p>
         </p:txBody>
       </p:sp>
@@ -7293,11 +7496,11 @@
           <a:bodyPr wrap="square" rtlCol="0" anchor="ctr"/>
           <a:lstStyle/>
           <a:p>
-            <a:pPr indent="0" marL="0">
-              <a:buNone/>
-            </a:pPr>
-            <a:r>
-              <a:rPr lang="en-US" sz="900" spc="200" kern="0" dirty="0">
+            <a:pPr marL="0" indent="0">
+              <a:buNone/>
+            </a:pPr>
+            <a:r>
+              <a:rPr lang="en-US" sz="900" kern="0" spc="200" dirty="0">
                 <a:solidFill>
                   <a:srgbClr val="F1ECDD"/>
                 </a:solidFill>
@@ -7332,7 +7535,7 @@
           <a:bodyPr wrap="square" rtlCol="0" anchor="ctr"/>
           <a:lstStyle/>
           <a:p>
-            <a:pPr algn="r" indent="0" marL="0">
+            <a:pPr marL="0" indent="0" algn="r">
               <a:buNone/>
             </a:pPr>
             <a:r>
@@ -7366,6 +7569,7 @@
         <a:solidFill>
           <a:srgbClr val="FFFFFF"/>
         </a:solidFill>
+        <a:effectLst/>
       </p:bgPr>
     </p:bg>
     <p:spTree>
@@ -7403,7 +7607,7 @@
           <a:bodyPr wrap="square" lIns="0" tIns="0" rIns="0" bIns="0" rtlCol="0" anchor="t"/>
           <a:lstStyle/>
           <a:p>
-            <a:pPr indent="0" marL="0">
+            <a:pPr marL="0" indent="0">
               <a:buNone/>
             </a:pPr>
             <a:r>
@@ -7430,22 +7634,34 @@
           <p:nvPr>
             <p:extLst>
               <p:ext uri="{D42A27DB-BD31-4B8C-83A1-F6EECF244321}">
-                <p14:modId xmlns:p14="http://schemas.microsoft.com/office/powerpoint/2010/main" val="1579011935"/>
+                <p14:modId xmlns:p14="http://schemas.microsoft.com/office/powerpoint/2010/main" val="528706702"/>
               </p:ext>
             </p:extLst>
           </p:nvPr>
         </p:nvGraphicFramePr>
         <p:xfrm>
-          <a:off x="548640" y="1920240"/>
-          <a:ext cx="8046720" cy="914400"/>
+          <a:off x="548640" y="1479973"/>
+          <a:ext cx="8046720" cy="2834640"/>
         </p:xfrm>
         <a:graphic>
           <a:graphicData uri="http://schemas.openxmlformats.org/drawingml/2006/table">
             <a:tbl>
               <a:tblPr/>
               <a:tblGrid>
-                <a:gridCol w="3200400"/>
-                <a:gridCol w="4846320"/>
+                <a:gridCol w="3200400">
+                  <a:extLst>
+                    <a:ext uri="{9D8B030D-6E8A-4147-A177-3AD203B41FA5}">
+                      <a16:colId xmlns:a16="http://schemas.microsoft.com/office/drawing/2014/main" val="20000"/>
+                    </a:ext>
+                  </a:extLst>
+                </a:gridCol>
+                <a:gridCol w="4846320">
+                  <a:extLst>
+                    <a:ext uri="{9D8B030D-6E8A-4147-A177-3AD203B41FA5}">
+                      <a16:colId xmlns:a16="http://schemas.microsoft.com/office/drawing/2014/main" val="20001"/>
+                    </a:ext>
+                  </a:extLst>
+                </a:gridCol>
               </a:tblGrid>
               <a:tr h="457200">
                 <a:tc>
@@ -7453,11 +7669,11 @@
                     <a:bodyPr/>
                     <a:lstStyle/>
                     <a:p>
-                      <a:pPr indent="0" marL="0">
+                      <a:pPr marL="0" indent="0">
                         <a:buNone/>
                       </a:pPr>
                       <a:r>
-                        <a:rPr lang="en-US" sz="1100" b="1" spc="300" kern="0" dirty="0">
+                        <a:rPr lang="en-US" sz="1100" b="1" kern="0" spc="300" dirty="0">
                           <a:solidFill>
                             <a:srgbClr val="7A8A95"/>
                           </a:solidFill>
@@ -7474,7 +7690,7 @@
                       </a:endParaRPr>
                     </a:p>
                   </a:txBody>
-                  <a:tcPr marL="91440" marR="91440" marT="45720" marB="45720">
+                  <a:tcPr>
                     <a:lnL w="0" cap="flat" cmpd="sng" algn="ctr">
                       <a:solidFill>
                         <a:srgbClr val="FFFFFF"/>
@@ -7521,11 +7737,11 @@
                     <a:bodyPr/>
                     <a:lstStyle/>
                     <a:p>
-                      <a:pPr indent="0" marL="0">
+                      <a:pPr marL="0" indent="0">
                         <a:buNone/>
                       </a:pPr>
                       <a:r>
-                        <a:rPr lang="en-US" sz="1100" b="1" spc="300" kern="0" dirty="0">
+                        <a:rPr lang="en-US" sz="1100" b="1" kern="0" spc="300" dirty="0">
                           <a:solidFill>
                             <a:srgbClr val="DC822E"/>
                           </a:solidFill>
@@ -7542,7 +7758,7 @@
                       </a:endParaRPr>
                     </a:p>
                   </a:txBody>
-                  <a:tcPr marL="91440" marR="91440" marT="45720" marB="45720">
+                  <a:tcPr>
                     <a:lnL w="0" cap="flat" cmpd="sng" algn="ctr">
                       <a:solidFill>
                         <a:srgbClr val="FFFFFF"/>
@@ -7584,6 +7800,11 @@
                     </a:solidFill>
                   </a:tcPr>
                 </a:tc>
+                <a:extLst>
+                  <a:ext uri="{0D108BD9-81ED-4DB2-BD59-A6C34878D82A}">
+                    <a16:rowId xmlns:a16="http://schemas.microsoft.com/office/drawing/2014/main" val="10000"/>
+                  </a:ext>
+                </a:extLst>
               </a:tr>
               <a:tr h="594360">
                 <a:tc>
@@ -7591,7 +7812,7 @@
                     <a:bodyPr/>
                     <a:lstStyle/>
                     <a:p>
-                      <a:pPr indent="0" marL="0">
+                      <a:pPr marL="0" indent="0">
                         <a:buNone/>
                       </a:pPr>
                       <a:r>
@@ -7612,7 +7833,7 @@
                       </a:endParaRPr>
                     </a:p>
                   </a:txBody>
-                  <a:tcPr marL="91440" marR="91440" marT="45720" marB="45720">
+                  <a:tcPr>
                     <a:lnL w="0" cap="flat" cmpd="sng" algn="ctr">
                       <a:solidFill>
                         <a:srgbClr val="FFFFFF"/>
@@ -7659,7 +7880,7 @@
                     <a:bodyPr/>
                     <a:lstStyle/>
                     <a:p>
-                      <a:pPr indent="0" marL="0">
+                      <a:pPr marL="0" indent="0">
                         <a:buNone/>
                       </a:pPr>
                       <a:r>
@@ -7680,7 +7901,7 @@
                       </a:endParaRPr>
                     </a:p>
                   </a:txBody>
-                  <a:tcPr marL="91440" marR="91440" marT="45720" marB="45720">
+                  <a:tcPr>
                     <a:lnL w="0" cap="flat" cmpd="sng" algn="ctr">
                       <a:solidFill>
                         <a:srgbClr val="FFFFFF"/>
@@ -7722,6 +7943,11 @@
                     </a:solidFill>
                   </a:tcPr>
                 </a:tc>
+                <a:extLst>
+                  <a:ext uri="{0D108BD9-81ED-4DB2-BD59-A6C34878D82A}">
+                    <a16:rowId xmlns:a16="http://schemas.microsoft.com/office/drawing/2014/main" val="10001"/>
+                  </a:ext>
+                </a:extLst>
               </a:tr>
               <a:tr h="594360">
                 <a:tc>
@@ -7729,7 +7955,7 @@
                     <a:bodyPr/>
                     <a:lstStyle/>
                     <a:p>
-                      <a:pPr indent="0" marL="0">
+                      <a:pPr marL="0" indent="0">
                         <a:buNone/>
                       </a:pPr>
                       <a:r>
@@ -7750,7 +7976,7 @@
                       </a:endParaRPr>
                     </a:p>
                   </a:txBody>
-                  <a:tcPr marL="91440" marR="91440" marT="45720" marB="45720">
+                  <a:tcPr>
                     <a:lnL w="0" cap="flat" cmpd="sng" algn="ctr">
                       <a:solidFill>
                         <a:srgbClr val="FFFFFF"/>
@@ -7797,7 +8023,7 @@
                     <a:bodyPr/>
                     <a:lstStyle/>
                     <a:p>
-                      <a:pPr indent="0" marL="0">
+                      <a:pPr marL="0" indent="0">
                         <a:buNone/>
                       </a:pPr>
                       <a:r>
@@ -7818,7 +8044,7 @@
                       </a:endParaRPr>
                     </a:p>
                   </a:txBody>
-                  <a:tcPr marL="91440" marR="91440" marT="45720" marB="45720">
+                  <a:tcPr>
                     <a:lnL w="0" cap="flat" cmpd="sng" algn="ctr">
                       <a:solidFill>
                         <a:srgbClr val="FFFFFF"/>
@@ -7860,6 +8086,11 @@
                     </a:solidFill>
                   </a:tcPr>
                 </a:tc>
+                <a:extLst>
+                  <a:ext uri="{0D108BD9-81ED-4DB2-BD59-A6C34878D82A}">
+                    <a16:rowId xmlns:a16="http://schemas.microsoft.com/office/drawing/2014/main" val="10002"/>
+                  </a:ext>
+                </a:extLst>
               </a:tr>
               <a:tr h="594360">
                 <a:tc>
@@ -7867,7 +8098,7 @@
                     <a:bodyPr/>
                     <a:lstStyle/>
                     <a:p>
-                      <a:pPr indent="0" marL="0">
+                      <a:pPr marL="0" indent="0">
                         <a:buNone/>
                       </a:pPr>
                       <a:r>
@@ -7888,7 +8119,7 @@
                       </a:endParaRPr>
                     </a:p>
                   </a:txBody>
-                  <a:tcPr marL="91440" marR="91440" marT="45720" marB="45720">
+                  <a:tcPr>
                     <a:lnL w="0" cap="flat" cmpd="sng" algn="ctr">
                       <a:solidFill>
                         <a:srgbClr val="FFFFFF"/>
@@ -7935,7 +8166,7 @@
                     <a:bodyPr/>
                     <a:lstStyle/>
                     <a:p>
-                      <a:pPr indent="0" marL="0">
+                      <a:pPr marL="0" indent="0">
                         <a:buNone/>
                       </a:pPr>
                       <a:r>
@@ -7956,7 +8187,7 @@
                       </a:endParaRPr>
                     </a:p>
                   </a:txBody>
-                  <a:tcPr marL="91440" marR="91440" marT="45720" marB="45720">
+                  <a:tcPr>
                     <a:lnL w="0" cap="flat" cmpd="sng" algn="ctr">
                       <a:solidFill>
                         <a:srgbClr val="FFFFFF"/>
@@ -7998,6 +8229,11 @@
                     </a:solidFill>
                   </a:tcPr>
                 </a:tc>
+                <a:extLst>
+                  <a:ext uri="{0D108BD9-81ED-4DB2-BD59-A6C34878D82A}">
+                    <a16:rowId xmlns:a16="http://schemas.microsoft.com/office/drawing/2014/main" val="10003"/>
+                  </a:ext>
+                </a:extLst>
               </a:tr>
               <a:tr h="594360">
                 <a:tc>
@@ -8005,7 +8241,7 @@
                     <a:bodyPr/>
                     <a:lstStyle/>
                     <a:p>
-                      <a:pPr indent="0" marL="0">
+                      <a:pPr marL="0" indent="0">
                         <a:buNone/>
                       </a:pPr>
                       <a:r>
@@ -8026,7 +8262,7 @@
                       </a:endParaRPr>
                     </a:p>
                   </a:txBody>
-                  <a:tcPr marL="91440" marR="91440" marT="45720" marB="45720">
+                  <a:tcPr>
                     <a:lnL w="0" cap="flat" cmpd="sng" algn="ctr">
                       <a:solidFill>
                         <a:srgbClr val="FFFFFF"/>
@@ -8073,7 +8309,7 @@
                     <a:bodyPr/>
                     <a:lstStyle/>
                     <a:p>
-                      <a:pPr indent="0" marL="0">
+                      <a:pPr marL="0" indent="0">
                         <a:buNone/>
                       </a:pPr>
                       <a:r>
@@ -8094,7 +8330,7 @@
                       </a:endParaRPr>
                     </a:p>
                   </a:txBody>
-                  <a:tcPr marL="91440" marR="91440" marT="45720" marB="45720">
+                  <a:tcPr>
                     <a:lnL w="0" cap="flat" cmpd="sng" algn="ctr">
                       <a:solidFill>
                         <a:srgbClr val="FFFFFF"/>
@@ -8136,6 +8372,11 @@
                     </a:solidFill>
                   </a:tcPr>
                 </a:tc>
+                <a:extLst>
+                  <a:ext uri="{0D108BD9-81ED-4DB2-BD59-A6C34878D82A}">
+                    <a16:rowId xmlns:a16="http://schemas.microsoft.com/office/drawing/2014/main" val="10004"/>
+                  </a:ext>
+                </a:extLst>
               </a:tr>
             </a:tbl>
           </a:graphicData>
@@ -8162,11 +8403,11 @@
           <a:bodyPr wrap="square" rtlCol="0" anchor="ctr"/>
           <a:lstStyle/>
           <a:p>
-            <a:pPr indent="0" marL="0">
-              <a:buNone/>
-            </a:pPr>
-            <a:r>
-              <a:rPr lang="en-US" sz="900" spc="200" kern="0" dirty="0">
+            <a:pPr marL="0" indent="0">
+              <a:buNone/>
+            </a:pPr>
+            <a:r>
+              <a:rPr lang="en-US" sz="900" kern="0" spc="200" dirty="0">
                 <a:solidFill>
                   <a:srgbClr val="7A8A95"/>
                 </a:solidFill>
@@ -8201,7 +8442,7 @@
           <a:bodyPr wrap="square" rtlCol="0" anchor="ctr"/>
           <a:lstStyle/>
           <a:p>
-            <a:pPr algn="r" indent="0" marL="0">
+            <a:pPr marL="0" indent="0" algn="r">
               <a:buNone/>
             </a:pPr>
             <a:r>
@@ -8520,4 +8761,319 @@
     </a:ext>
   </a:extLst>
 </a:theme>
+</file>
+
+<file path=ppt/theme/theme2.xml><?xml version="1.0" encoding="utf-8"?>
+<a:theme xmlns:a="http://schemas.openxmlformats.org/drawingml/2006/main" name="Office">
+  <a:themeElements>
+    <a:clrScheme name="Office">
+      <a:dk1>
+        <a:sysClr val="windowText" lastClr="000000"/>
+      </a:dk1>
+      <a:lt1>
+        <a:sysClr val="window" lastClr="FFFFFF"/>
+      </a:lt1>
+      <a:dk2>
+        <a:srgbClr val="0E2841"/>
+      </a:dk2>
+      <a:lt2>
+        <a:srgbClr val="E8E8E8"/>
+      </a:lt2>
+      <a:accent1>
+        <a:srgbClr val="156082"/>
+      </a:accent1>
+      <a:accent2>
+        <a:srgbClr val="E97132"/>
+      </a:accent2>
+      <a:accent3>
+        <a:srgbClr val="196B24"/>
+      </a:accent3>
+      <a:accent4>
+        <a:srgbClr val="0F9ED5"/>
+      </a:accent4>
+      <a:accent5>
+        <a:srgbClr val="A02B93"/>
+      </a:accent5>
+      <a:accent6>
+        <a:srgbClr val="4EA72E"/>
+      </a:accent6>
+      <a:hlink>
+        <a:srgbClr val="467886"/>
+      </a:hlink>
+      <a:folHlink>
+        <a:srgbClr val="96607D"/>
+      </a:folHlink>
+    </a:clrScheme>
+    <a:fontScheme name="Office">
+      <a:majorFont>
+        <a:latin typeface="Aptos Display" panose="02110004020202020204"/>
+        <a:ea typeface=""/>
+        <a:cs typeface=""/>
+        <a:font script="Jpan" typeface="游ゴシック Light"/>
+        <a:font script="Hang" typeface="맑은 고딕"/>
+        <a:font script="Hans" typeface="等线 Light"/>
+        <a:font script="Hant" typeface="新細明體"/>
+        <a:font script="Arab" typeface="Times New Roman"/>
+        <a:font script="Hebr" typeface="Times New Roman"/>
+        <a:font script="Thai" typeface="Angsana New"/>
+        <a:font script="Ethi" typeface="Nyala"/>
+        <a:font script="Beng" typeface="Vrinda"/>
+        <a:font script="Gujr" typeface="Shruti"/>
+        <a:font script="Khmr" typeface="MoolBoran"/>
+        <a:font script="Knda" typeface="Tunga"/>
+        <a:font script="Guru" typeface="Raavi"/>
+        <a:font script="Cans" typeface="Euphemia"/>
+        <a:font script="Cher" typeface="Plantagenet Cherokee"/>
+        <a:font script="Yiii" typeface="Microsoft Yi Baiti"/>
+        <a:font script="Tibt" typeface="Microsoft Himalaya"/>
+        <a:font script="Thaa" typeface="MV Boli"/>
+        <a:font script="Deva" typeface="Mangal"/>
+        <a:font script="Telu" typeface="Gautami"/>
+        <a:font script="Taml" typeface="Latha"/>
+        <a:font script="Syrc" typeface="Estrangelo Edessa"/>
+        <a:font script="Orya" typeface="Kalinga"/>
+        <a:font script="Mlym" typeface="Kartika"/>
+        <a:font script="Laoo" typeface="DokChampa"/>
+        <a:font script="Sinh" typeface="Iskoola Pota"/>
+        <a:font script="Mong" typeface="Mongolian Baiti"/>
+        <a:font script="Viet" typeface="Times New Roman"/>
+        <a:font script="Uigh" typeface="Microsoft Uighur"/>
+        <a:font script="Geor" typeface="Sylfaen"/>
+        <a:font script="Armn" typeface="Arial"/>
+        <a:font script="Bugi" typeface="Leelawadee UI"/>
+        <a:font script="Bopo" typeface="Microsoft JhengHei"/>
+        <a:font script="Java" typeface="Javanese Text"/>
+        <a:font script="Lisu" typeface="Segoe UI"/>
+        <a:font script="Mymr" typeface="Myanmar Text"/>
+        <a:font script="Nkoo" typeface="Ebrima"/>
+        <a:font script="Olck" typeface="Nirmala UI"/>
+        <a:font script="Osma" typeface="Ebrima"/>
+        <a:font script="Phag" typeface="Phagspa"/>
+        <a:font script="Syrn" typeface="Estrangelo Edessa"/>
+        <a:font script="Syrj" typeface="Estrangelo Edessa"/>
+        <a:font script="Syre" typeface="Estrangelo Edessa"/>
+        <a:font script="Sora" typeface="Nirmala UI"/>
+        <a:font script="Tale" typeface="Microsoft Tai Le"/>
+        <a:font script="Talu" typeface="Microsoft New Tai Lue"/>
+        <a:font script="Tfng" typeface="Ebrima"/>
+      </a:majorFont>
+      <a:minorFont>
+        <a:latin typeface="Aptos" panose="02110004020202020204"/>
+        <a:ea typeface=""/>
+        <a:cs typeface=""/>
+        <a:font script="Jpan" typeface="游ゴシック"/>
+        <a:font script="Hang" typeface="맑은 고딕"/>
+        <a:font script="Hans" typeface="等线"/>
+        <a:font script="Hant" typeface="新細明體"/>
+        <a:font script="Arab" typeface="Arial"/>
+        <a:font script="Hebr" typeface="Arial"/>
+        <a:font script="Thai" typeface="Cordia New"/>
+        <a:font script="Ethi" typeface="Nyala"/>
+        <a:font script="Beng" typeface="Vrinda"/>
+        <a:font script="Gujr" typeface="Shruti"/>
+        <a:font script="Khmr" typeface="DaunPenh"/>
+        <a:font script="Knda" typeface="Tunga"/>
+        <a:font script="Guru" typeface="Raavi"/>
+        <a:font script="Cans" typeface="Euphemia"/>
+        <a:font script="Cher" typeface="Plantagenet Cherokee"/>
+        <a:font script="Yiii" typeface="Microsoft Yi Baiti"/>
+        <a:font script="Tibt" typeface="Microsoft Himalaya"/>
+        <a:font script="Thaa" typeface="MV Boli"/>
+        <a:font script="Deva" typeface="Mangal"/>
+        <a:font script="Telu" typeface="Gautami"/>
+        <a:font script="Taml" typeface="Latha"/>
+        <a:font script="Syrc" typeface="Estrangelo Edessa"/>
+        <a:font script="Orya" typeface="Kalinga"/>
+        <a:font script="Mlym" typeface="Kartika"/>
+        <a:font script="Laoo" typeface="DokChampa"/>
+        <a:font script="Sinh" typeface="Iskoola Pota"/>
+        <a:font script="Mong" typeface="Mongolian Baiti"/>
+        <a:font script="Viet" typeface="Arial"/>
+        <a:font script="Uigh" typeface="Microsoft Uighur"/>
+        <a:font script="Geor" typeface="Sylfaen"/>
+        <a:font script="Armn" typeface="Arial"/>
+        <a:font script="Bugi" typeface="Leelawadee UI"/>
+        <a:font script="Bopo" typeface="Microsoft JhengHei"/>
+        <a:font script="Java" typeface="Javanese Text"/>
+        <a:font script="Lisu" typeface="Segoe UI"/>
+        <a:font script="Mymr" typeface="Myanmar Text"/>
+        <a:font script="Nkoo" typeface="Ebrima"/>
+        <a:font script="Olck" typeface="Nirmala UI"/>
+        <a:font script="Osma" typeface="Ebrima"/>
+        <a:font script="Phag" typeface="Phagspa"/>
+        <a:font script="Syrn" typeface="Estrangelo Edessa"/>
+        <a:font script="Syrj" typeface="Estrangelo Edessa"/>
+        <a:font script="Syre" typeface="Estrangelo Edessa"/>
+        <a:font script="Sora" typeface="Nirmala UI"/>
+        <a:font script="Tale" typeface="Microsoft Tai Le"/>
+        <a:font script="Talu" typeface="Microsoft New Tai Lue"/>
+        <a:font script="Tfng" typeface="Ebrima"/>
+      </a:minorFont>
+    </a:fontScheme>
+    <a:fmtScheme name="Office">
+      <a:fillStyleLst>
+        <a:solidFill>
+          <a:schemeClr val="phClr"/>
+        </a:solidFill>
+        <a:gradFill rotWithShape="1">
+          <a:gsLst>
+            <a:gs pos="0">
+              <a:schemeClr val="phClr">
+                <a:lumMod val="110000"/>
+                <a:satMod val="105000"/>
+                <a:tint val="67000"/>
+              </a:schemeClr>
+            </a:gs>
+            <a:gs pos="50000">
+              <a:schemeClr val="phClr">
+                <a:lumMod val="105000"/>
+                <a:satMod val="103000"/>
+                <a:tint val="73000"/>
+              </a:schemeClr>
+            </a:gs>
+            <a:gs pos="100000">
+              <a:schemeClr val="phClr">
+                <a:lumMod val="105000"/>
+                <a:satMod val="109000"/>
+                <a:tint val="81000"/>
+              </a:schemeClr>
+            </a:gs>
+          </a:gsLst>
+          <a:lin ang="5400000" scaled="0"/>
+        </a:gradFill>
+        <a:gradFill rotWithShape="1">
+          <a:gsLst>
+            <a:gs pos="0">
+              <a:schemeClr val="phClr">
+                <a:satMod val="103000"/>
+                <a:lumMod val="102000"/>
+                <a:tint val="94000"/>
+              </a:schemeClr>
+            </a:gs>
+            <a:gs pos="50000">
+              <a:schemeClr val="phClr">
+                <a:satMod val="110000"/>
+                <a:lumMod val="100000"/>
+                <a:shade val="100000"/>
+              </a:schemeClr>
+            </a:gs>
+            <a:gs pos="100000">
+              <a:schemeClr val="phClr">
+                <a:lumMod val="99000"/>
+                <a:satMod val="120000"/>
+                <a:shade val="78000"/>
+              </a:schemeClr>
+            </a:gs>
+          </a:gsLst>
+          <a:lin ang="5400000" scaled="0"/>
+        </a:gradFill>
+      </a:fillStyleLst>
+      <a:lnStyleLst>
+        <a:ln w="12700" cap="flat" cmpd="sng" algn="ctr">
+          <a:solidFill>
+            <a:schemeClr val="phClr"/>
+          </a:solidFill>
+          <a:prstDash val="solid"/>
+          <a:miter lim="800000"/>
+        </a:ln>
+        <a:ln w="19050" cap="flat" cmpd="sng" algn="ctr">
+          <a:solidFill>
+            <a:schemeClr val="phClr"/>
+          </a:solidFill>
+          <a:prstDash val="solid"/>
+          <a:miter lim="800000"/>
+        </a:ln>
+        <a:ln w="25400" cap="flat" cmpd="sng" algn="ctr">
+          <a:solidFill>
+            <a:schemeClr val="phClr"/>
+          </a:solidFill>
+          <a:prstDash val="solid"/>
+          <a:miter lim="800000"/>
+        </a:ln>
+      </a:lnStyleLst>
+      <a:effectStyleLst>
+        <a:effectStyle>
+          <a:effectLst/>
+        </a:effectStyle>
+        <a:effectStyle>
+          <a:effectLst/>
+        </a:effectStyle>
+        <a:effectStyle>
+          <a:effectLst>
+            <a:outerShdw blurRad="57150" dist="19050" dir="5400000" algn="ctr" rotWithShape="0">
+              <a:srgbClr val="000000">
+                <a:alpha val="63000"/>
+              </a:srgbClr>
+            </a:outerShdw>
+          </a:effectLst>
+        </a:effectStyle>
+      </a:effectStyleLst>
+      <a:bgFillStyleLst>
+        <a:solidFill>
+          <a:schemeClr val="phClr"/>
+        </a:solidFill>
+        <a:solidFill>
+          <a:schemeClr val="phClr">
+            <a:tint val="95000"/>
+            <a:satMod val="170000"/>
+          </a:schemeClr>
+        </a:solidFill>
+        <a:gradFill rotWithShape="1">
+          <a:gsLst>
+            <a:gs pos="0">
+              <a:schemeClr val="phClr">
+                <a:tint val="93000"/>
+                <a:satMod val="150000"/>
+                <a:shade val="98000"/>
+                <a:lumMod val="102000"/>
+              </a:schemeClr>
+            </a:gs>
+            <a:gs pos="50000">
+              <a:schemeClr val="phClr">
+                <a:tint val="98000"/>
+                <a:satMod val="130000"/>
+                <a:shade val="90000"/>
+                <a:lumMod val="103000"/>
+              </a:schemeClr>
+            </a:gs>
+            <a:gs pos="100000">
+              <a:schemeClr val="phClr">
+                <a:shade val="63000"/>
+                <a:satMod val="120000"/>
+              </a:schemeClr>
+            </a:gs>
+          </a:gsLst>
+          <a:lin ang="5400000" scaled="0"/>
+        </a:gradFill>
+      </a:bgFillStyleLst>
+    </a:fmtScheme>
+  </a:themeElements>
+  <a:objectDefaults>
+    <a:lnDef>
+      <a:spPr/>
+      <a:bodyPr/>
+      <a:lstStyle/>
+      <a:style>
+        <a:lnRef idx="2">
+          <a:schemeClr val="accent1"/>
+        </a:lnRef>
+        <a:fillRef idx="0">
+          <a:schemeClr val="accent1"/>
+        </a:fillRef>
+        <a:effectRef idx="1">
+          <a:schemeClr val="accent1"/>
+        </a:effectRef>
+        <a:fontRef idx="minor">
+          <a:schemeClr val="tx1"/>
+        </a:fontRef>
+      </a:style>
+    </a:lnDef>
+  </a:objectDefaults>
+  <a:extraClrSchemeLst/>
+  <a:extLst>
+    <a:ext uri="{05A4C25C-085E-4340-85A3-A5531E510DB2}">
+      <thm15:themeFamily xmlns:thm15="http://schemas.microsoft.com/office/thememl/2012/main" name="Office Theme" id="{2E142A2C-CD16-42D6-873A-C26D2A0506FA}" vid="{1BDDFF52-6CD6-40A5-AB3C-68EB2F1E4D0A}"/>
+    </a:ext>
+  </a:extLst>
+</a:theme>
 </file>